--- a/test-kit/SSF-Merge-test-template.pptx
+++ b/test-kit/SSF-Merge-test-template.pptx
@@ -4,12 +4,15 @@
   <p:sldMasterIdLst>
     <p:sldMasterId id="2147483648" r:id="rId1"/>
   </p:sldMasterIdLst>
+  <p:notesMasterIdLst>
+    <p:notesMasterId r:id="rId5"/>
+  </p:notesMasterIdLst>
   <p:sldIdLst>
-    <p:sldId id="256" r:id="rId7"/>
-    <p:sldId id="257" r:id="rId8"/>
-    <p:sldId id="258" r:id="rId10"/>
+    <p:sldId id="256" r:id="rId2"/>
+    <p:sldId id="257" r:id="rId3"/>
+    <p:sldId id="258" r:id="rId4"/>
   </p:sldIdLst>
-  <p:sldSz cx="12191695" cy="6858000" type="screen4x3"/>
+  <p:sldSz cx="12192000" cy="6858000"/>
   <p:notesSz cx="6858000" cy="9144000"/>
   <p:defaultTextStyle>
     <a:defPPr>
@@ -106,12 +109,31 @@
       </a:defRPr>
     </a:lvl9pPr>
   </p:defaultTextStyle>
+  <p:extLst>
+    <p:ext uri="{EFAFB233-063F-42B5-8137-9DF3F51BA10A}">
+      <p15:sldGuideLst xmlns:p15="http://schemas.microsoft.com/office/powerpoint/2012/main">
+        <p15:guide id="1" orient="horz" pos="2160">
+          <p15:clr>
+            <a:srgbClr val="A4A3A4"/>
+          </p15:clr>
+        </p15:guide>
+        <p15:guide id="2" pos="2880">
+          <p15:clr>
+            <a:srgbClr val="A4A3A4"/>
+          </p15:clr>
+        </p15:guide>
+      </p15:sldGuideLst>
+    </p:ext>
+  </p:extLst>
 </p:presentation>
 </file>
 
 <file path=ppt/charts/chart1.xml><?xml version="1.0" encoding="utf-8"?>
-<c:chartSpace xmlns:c="http://schemas.openxmlformats.org/drawingml/2006/chart" xmlns:a="http://schemas.openxmlformats.org/drawingml/2006/main" xmlns:r="http://schemas.openxmlformats.org/officeDocument/2006/relationships">
+<c:chartSpace xmlns:c="http://schemas.openxmlformats.org/drawingml/2006/chart" xmlns:a="http://schemas.openxmlformats.org/drawingml/2006/main" xmlns:r="http://schemas.openxmlformats.org/officeDocument/2006/relationships" xmlns:c16r2="http://schemas.microsoft.com/office/drawing/2015/06/chart">
   <c:date1904 val="0"/>
+  <c:lang val="en-US"/>
+  <c:roundedCorners val="1"/>
+  <c:style val="2"/>
   <c:chart>
     <c:title>
       <c:tx>
@@ -125,14 +147,15 @@
           </a:p>
         </c:rich>
       </c:tx>
-      <c:layout/>
       <c:overlay val="0"/>
     </c:title>
     <c:autoTitleDeleted val="0"/>
     <c:plotArea>
+      <c:layout/>
       <c:barChart>
         <c:barDir val="col"/>
         <c:grouping val="clustered"/>
+        <c:varyColors val="1"/>
         <c:ser>
           <c:idx val="0"/>
           <c:order val="0"/>
@@ -147,6 +170,7 @@
               </c:strCache>
             </c:strRef>
           </c:tx>
+          <c:invertIfNegative val="1"/>
           <c:cat>
             <c:strRef>
               <c:f>Sheet1!$A$2:$A$3</c:f>
@@ -168,15 +192,29 @@
                 <c:formatCode>General</c:formatCode>
                 <c:ptCount val="2"/>
                 <c:pt idx="0">
-                  <c:v>18.0</c:v>
+                  <c:v>18</c:v>
                 </c:pt>
                 <c:pt idx="1">
-                  <c:v>42.0</c:v>
+                  <c:v>42</c:v>
                 </c:pt>
               </c:numCache>
             </c:numRef>
           </c:val>
+          <c:extLst>
+            <c:ext xmlns:c16="http://schemas.microsoft.com/office/drawing/2014/chart" uri="{C3380CC4-5D6E-409C-BE32-E72D297353CC}">
+              <c16:uniqueId val="{00000000-C6B1-49A0-B7CC-8880CBE9A6F6}"/>
+            </c:ext>
+          </c:extLst>
         </c:ser>
+        <c:dLbls>
+          <c:showLegendKey val="0"/>
+          <c:showVal val="0"/>
+          <c:showCatName val="0"/>
+          <c:showSerName val="0"/>
+          <c:showPercent val="0"/>
+          <c:showBubbleSize val="0"/>
+        </c:dLbls>
+        <c:gapWidth val="150"/>
         <c:axId val="-2068027336"/>
         <c:axId val="-2113994440"/>
       </c:barChart>
@@ -187,6 +225,7 @@
         </c:scaling>
         <c:delete val="0"/>
         <c:axPos val="b"/>
+        <c:numFmt formatCode="General" sourceLinked="0"/>
         <c:majorTickMark val="out"/>
         <c:minorTickMark val="none"/>
         <c:tickLblPos val="nextTo"/>
@@ -199,18 +238,24 @@
       </c:catAx>
       <c:valAx>
         <c:axId val="-2113994440"/>
-        <c:scaling/>
+        <c:scaling>
+          <c:orientation val="minMax"/>
+        </c:scaling>
         <c:delete val="0"/>
         <c:axPos val="l"/>
         <c:majorGridlines/>
+        <c:numFmt formatCode="General" sourceLinked="1"/>
         <c:majorTickMark val="out"/>
         <c:minorTickMark val="none"/>
         <c:tickLblPos val="nextTo"/>
         <c:crossAx val="-2068027336"/>
         <c:crosses val="autoZero"/>
+        <c:crossBetween val="between"/>
       </c:valAx>
     </c:plotArea>
+    <c:plotVisOnly val="1"/>
     <c:dispBlanksAs val="gap"/>
+    <c:showDLblsOverMax val="1"/>
   </c:chart>
   <c:txPr>
     <a:bodyPr/>
@@ -228,8 +273,2565 @@
 </c:chartSpace>
 </file>
 
+<file path=ppt/diagrams/colors1.xml><?xml version="1.0" encoding="utf-8"?>
+<dgm:colorsDef xmlns:dgm="http://schemas.openxmlformats.org/drawingml/2006/diagram" xmlns:a="http://schemas.openxmlformats.org/drawingml/2006/main" uniqueId="urn:microsoft.com/office/officeart/2005/8/colors/accent1_2">
+  <dgm:title val=""/>
+  <dgm:desc val=""/>
+  <dgm:catLst>
+    <dgm:cat type="accent1" pri="11200"/>
+  </dgm:catLst>
+  <dgm:styleLbl name="node0">
+    <dgm:fillClrLst meth="repeat">
+      <a:schemeClr val="accent1"/>
+    </dgm:fillClrLst>
+    <dgm:linClrLst meth="repeat">
+      <a:schemeClr val="lt1"/>
+    </dgm:linClrLst>
+    <dgm:effectClrLst/>
+    <dgm:txLinClrLst/>
+    <dgm:txFillClrLst/>
+    <dgm:txEffectClrLst/>
+  </dgm:styleLbl>
+  <dgm:styleLbl name="alignNode1">
+    <dgm:fillClrLst meth="repeat">
+      <a:schemeClr val="accent1"/>
+    </dgm:fillClrLst>
+    <dgm:linClrLst meth="repeat">
+      <a:schemeClr val="accent1"/>
+    </dgm:linClrLst>
+    <dgm:effectClrLst/>
+    <dgm:txLinClrLst/>
+    <dgm:txFillClrLst/>
+    <dgm:txEffectClrLst/>
+  </dgm:styleLbl>
+  <dgm:styleLbl name="node1">
+    <dgm:fillClrLst meth="repeat">
+      <a:schemeClr val="accent1"/>
+    </dgm:fillClrLst>
+    <dgm:linClrLst meth="repeat">
+      <a:schemeClr val="lt1"/>
+    </dgm:linClrLst>
+    <dgm:effectClrLst/>
+    <dgm:txLinClrLst/>
+    <dgm:txFillClrLst/>
+    <dgm:txEffectClrLst/>
+  </dgm:styleLbl>
+  <dgm:styleLbl name="lnNode1">
+    <dgm:fillClrLst meth="repeat">
+      <a:schemeClr val="accent1"/>
+    </dgm:fillClrLst>
+    <dgm:linClrLst meth="repeat">
+      <a:schemeClr val="lt1"/>
+    </dgm:linClrLst>
+    <dgm:effectClrLst/>
+    <dgm:txLinClrLst/>
+    <dgm:txFillClrLst/>
+    <dgm:txEffectClrLst/>
+  </dgm:styleLbl>
+  <dgm:styleLbl name="vennNode1">
+    <dgm:fillClrLst meth="repeat">
+      <a:schemeClr val="accent1">
+        <a:alpha val="50000"/>
+      </a:schemeClr>
+    </dgm:fillClrLst>
+    <dgm:linClrLst meth="repeat">
+      <a:schemeClr val="lt1"/>
+    </dgm:linClrLst>
+    <dgm:effectClrLst/>
+    <dgm:txLinClrLst/>
+    <dgm:txFillClrLst/>
+    <dgm:txEffectClrLst/>
+  </dgm:styleLbl>
+  <dgm:styleLbl name="node2">
+    <dgm:fillClrLst meth="repeat">
+      <a:schemeClr val="accent1"/>
+    </dgm:fillClrLst>
+    <dgm:linClrLst meth="repeat">
+      <a:schemeClr val="lt1"/>
+    </dgm:linClrLst>
+    <dgm:effectClrLst/>
+    <dgm:txLinClrLst/>
+    <dgm:txFillClrLst/>
+    <dgm:txEffectClrLst/>
+  </dgm:styleLbl>
+  <dgm:styleLbl name="node3">
+    <dgm:fillClrLst meth="repeat">
+      <a:schemeClr val="accent1"/>
+    </dgm:fillClrLst>
+    <dgm:linClrLst meth="repeat">
+      <a:schemeClr val="lt1"/>
+    </dgm:linClrLst>
+    <dgm:effectClrLst/>
+    <dgm:txLinClrLst/>
+    <dgm:txFillClrLst/>
+    <dgm:txEffectClrLst/>
+  </dgm:styleLbl>
+  <dgm:styleLbl name="node4">
+    <dgm:fillClrLst meth="repeat">
+      <a:schemeClr val="accent1"/>
+    </dgm:fillClrLst>
+    <dgm:linClrLst meth="repeat">
+      <a:schemeClr val="lt1"/>
+    </dgm:linClrLst>
+    <dgm:effectClrLst/>
+    <dgm:txLinClrLst/>
+    <dgm:txFillClrLst/>
+    <dgm:txEffectClrLst/>
+  </dgm:styleLbl>
+  <dgm:styleLbl name="fgImgPlace1">
+    <dgm:fillClrLst meth="repeat">
+      <a:schemeClr val="accent1">
+        <a:tint val="50000"/>
+      </a:schemeClr>
+    </dgm:fillClrLst>
+    <dgm:linClrLst meth="repeat">
+      <a:schemeClr val="lt1"/>
+    </dgm:linClrLst>
+    <dgm:effectClrLst/>
+    <dgm:txLinClrLst/>
+    <dgm:txFillClrLst meth="repeat">
+      <a:schemeClr val="lt1"/>
+    </dgm:txFillClrLst>
+    <dgm:txEffectClrLst/>
+  </dgm:styleLbl>
+  <dgm:styleLbl name="alignImgPlace1">
+    <dgm:fillClrLst meth="repeat">
+      <a:schemeClr val="accent1">
+        <a:tint val="50000"/>
+      </a:schemeClr>
+    </dgm:fillClrLst>
+    <dgm:linClrLst meth="repeat">
+      <a:schemeClr val="lt1"/>
+    </dgm:linClrLst>
+    <dgm:effectClrLst/>
+    <dgm:txLinClrLst/>
+    <dgm:txFillClrLst meth="repeat">
+      <a:schemeClr val="lt1"/>
+    </dgm:txFillClrLst>
+    <dgm:txEffectClrLst/>
+  </dgm:styleLbl>
+  <dgm:styleLbl name="bgImgPlace1">
+    <dgm:fillClrLst meth="repeat">
+      <a:schemeClr val="accent1">
+        <a:tint val="50000"/>
+      </a:schemeClr>
+    </dgm:fillClrLst>
+    <dgm:linClrLst meth="repeat">
+      <a:schemeClr val="lt1"/>
+    </dgm:linClrLst>
+    <dgm:effectClrLst/>
+    <dgm:txLinClrLst/>
+    <dgm:txFillClrLst meth="repeat">
+      <a:schemeClr val="lt1"/>
+    </dgm:txFillClrLst>
+    <dgm:txEffectClrLst/>
+  </dgm:styleLbl>
+  <dgm:styleLbl name="sibTrans2D1">
+    <dgm:fillClrLst meth="repeat">
+      <a:schemeClr val="accent1">
+        <a:tint val="60000"/>
+      </a:schemeClr>
+    </dgm:fillClrLst>
+    <dgm:linClrLst meth="repeat">
+      <a:schemeClr val="accent1">
+        <a:tint val="60000"/>
+      </a:schemeClr>
+    </dgm:linClrLst>
+    <dgm:effectClrLst/>
+    <dgm:txLinClrLst/>
+    <dgm:txFillClrLst/>
+    <dgm:txEffectClrLst/>
+  </dgm:styleLbl>
+  <dgm:styleLbl name="fgSibTrans2D1">
+    <dgm:fillClrLst meth="repeat">
+      <a:schemeClr val="accent1">
+        <a:tint val="60000"/>
+      </a:schemeClr>
+    </dgm:fillClrLst>
+    <dgm:linClrLst meth="repeat">
+      <a:schemeClr val="accent1">
+        <a:tint val="60000"/>
+      </a:schemeClr>
+    </dgm:linClrLst>
+    <dgm:effectClrLst/>
+    <dgm:txLinClrLst/>
+    <dgm:txFillClrLst/>
+    <dgm:txEffectClrLst/>
+  </dgm:styleLbl>
+  <dgm:styleLbl name="bgSibTrans2D1">
+    <dgm:fillClrLst meth="repeat">
+      <a:schemeClr val="accent1">
+        <a:tint val="60000"/>
+      </a:schemeClr>
+    </dgm:fillClrLst>
+    <dgm:linClrLst meth="repeat">
+      <a:schemeClr val="accent1">
+        <a:tint val="60000"/>
+      </a:schemeClr>
+    </dgm:linClrLst>
+    <dgm:effectClrLst/>
+    <dgm:txLinClrLst/>
+    <dgm:txFillClrLst/>
+    <dgm:txEffectClrLst/>
+  </dgm:styleLbl>
+  <dgm:styleLbl name="sibTrans1D1">
+    <dgm:fillClrLst meth="repeat">
+      <a:schemeClr val="accent1"/>
+    </dgm:fillClrLst>
+    <dgm:linClrLst meth="repeat">
+      <a:schemeClr val="accent1"/>
+    </dgm:linClrLst>
+    <dgm:effectClrLst/>
+    <dgm:txLinClrLst/>
+    <dgm:txFillClrLst meth="repeat">
+      <a:schemeClr val="tx1"/>
+    </dgm:txFillClrLst>
+    <dgm:txEffectClrLst/>
+  </dgm:styleLbl>
+  <dgm:styleLbl name="callout">
+    <dgm:fillClrLst meth="repeat">
+      <a:schemeClr val="accent1"/>
+    </dgm:fillClrLst>
+    <dgm:linClrLst meth="repeat">
+      <a:schemeClr val="accent1">
+        <a:tint val="50000"/>
+      </a:schemeClr>
+    </dgm:linClrLst>
+    <dgm:effectClrLst/>
+    <dgm:txLinClrLst/>
+    <dgm:txFillClrLst meth="repeat">
+      <a:schemeClr val="tx1"/>
+    </dgm:txFillClrLst>
+    <dgm:txEffectClrLst/>
+  </dgm:styleLbl>
+  <dgm:styleLbl name="asst0">
+    <dgm:fillClrLst meth="repeat">
+      <a:schemeClr val="accent1"/>
+    </dgm:fillClrLst>
+    <dgm:linClrLst meth="repeat">
+      <a:schemeClr val="lt1"/>
+    </dgm:linClrLst>
+    <dgm:effectClrLst/>
+    <dgm:txLinClrLst/>
+    <dgm:txFillClrLst/>
+    <dgm:txEffectClrLst/>
+  </dgm:styleLbl>
+  <dgm:styleLbl name="asst1">
+    <dgm:fillClrLst meth="repeat">
+      <a:schemeClr val="accent1"/>
+    </dgm:fillClrLst>
+    <dgm:linClrLst meth="repeat">
+      <a:schemeClr val="lt1"/>
+    </dgm:linClrLst>
+    <dgm:effectClrLst/>
+    <dgm:txLinClrLst/>
+    <dgm:txFillClrLst/>
+    <dgm:txEffectClrLst/>
+  </dgm:styleLbl>
+  <dgm:styleLbl name="asst2">
+    <dgm:fillClrLst meth="repeat">
+      <a:schemeClr val="accent1"/>
+    </dgm:fillClrLst>
+    <dgm:linClrLst meth="repeat">
+      <a:schemeClr val="lt1"/>
+    </dgm:linClrLst>
+    <dgm:effectClrLst/>
+    <dgm:txLinClrLst/>
+    <dgm:txFillClrLst/>
+    <dgm:txEffectClrLst/>
+  </dgm:styleLbl>
+  <dgm:styleLbl name="asst3">
+    <dgm:fillClrLst meth="repeat">
+      <a:schemeClr val="accent1"/>
+    </dgm:fillClrLst>
+    <dgm:linClrLst meth="repeat">
+      <a:schemeClr val="lt1"/>
+    </dgm:linClrLst>
+    <dgm:effectClrLst/>
+    <dgm:txLinClrLst/>
+    <dgm:txFillClrLst/>
+    <dgm:txEffectClrLst/>
+  </dgm:styleLbl>
+  <dgm:styleLbl name="asst4">
+    <dgm:fillClrLst meth="repeat">
+      <a:schemeClr val="accent1"/>
+    </dgm:fillClrLst>
+    <dgm:linClrLst meth="repeat">
+      <a:schemeClr val="lt1"/>
+    </dgm:linClrLst>
+    <dgm:effectClrLst/>
+    <dgm:txLinClrLst/>
+    <dgm:txFillClrLst/>
+    <dgm:txEffectClrLst/>
+  </dgm:styleLbl>
+  <dgm:styleLbl name="parChTrans2D1">
+    <dgm:fillClrLst meth="repeat">
+      <a:schemeClr val="accent1">
+        <a:tint val="60000"/>
+      </a:schemeClr>
+    </dgm:fillClrLst>
+    <dgm:linClrLst meth="repeat">
+      <a:schemeClr val="accent1">
+        <a:tint val="60000"/>
+      </a:schemeClr>
+    </dgm:linClrLst>
+    <dgm:effectClrLst/>
+    <dgm:txLinClrLst/>
+    <dgm:txFillClrLst meth="repeat">
+      <a:schemeClr val="lt1"/>
+    </dgm:txFillClrLst>
+    <dgm:txEffectClrLst/>
+  </dgm:styleLbl>
+  <dgm:styleLbl name="parChTrans2D2">
+    <dgm:fillClrLst meth="repeat">
+      <a:schemeClr val="accent1"/>
+    </dgm:fillClrLst>
+    <dgm:linClrLst meth="repeat">
+      <a:schemeClr val="accent1"/>
+    </dgm:linClrLst>
+    <dgm:effectClrLst/>
+    <dgm:txLinClrLst/>
+    <dgm:txFillClrLst meth="repeat">
+      <a:schemeClr val="lt1"/>
+    </dgm:txFillClrLst>
+    <dgm:txEffectClrLst/>
+  </dgm:styleLbl>
+  <dgm:styleLbl name="parChTrans2D3">
+    <dgm:fillClrLst meth="repeat">
+      <a:schemeClr val="accent1"/>
+    </dgm:fillClrLst>
+    <dgm:linClrLst meth="repeat">
+      <a:schemeClr val="accent1"/>
+    </dgm:linClrLst>
+    <dgm:effectClrLst/>
+    <dgm:txLinClrLst/>
+    <dgm:txFillClrLst meth="repeat">
+      <a:schemeClr val="lt1"/>
+    </dgm:txFillClrLst>
+    <dgm:txEffectClrLst/>
+  </dgm:styleLbl>
+  <dgm:styleLbl name="parChTrans2D4">
+    <dgm:fillClrLst meth="repeat">
+      <a:schemeClr val="accent1"/>
+    </dgm:fillClrLst>
+    <dgm:linClrLst meth="repeat">
+      <a:schemeClr val="accent1"/>
+    </dgm:linClrLst>
+    <dgm:effectClrLst/>
+    <dgm:txLinClrLst/>
+    <dgm:txFillClrLst meth="repeat">
+      <a:schemeClr val="lt1"/>
+    </dgm:txFillClrLst>
+    <dgm:txEffectClrLst/>
+  </dgm:styleLbl>
+  <dgm:styleLbl name="parChTrans1D1">
+    <dgm:fillClrLst meth="repeat">
+      <a:schemeClr val="accent1"/>
+    </dgm:fillClrLst>
+    <dgm:linClrLst meth="repeat">
+      <a:schemeClr val="accent1">
+        <a:shade val="60000"/>
+      </a:schemeClr>
+    </dgm:linClrLst>
+    <dgm:effectClrLst/>
+    <dgm:txLinClrLst/>
+    <dgm:txFillClrLst meth="repeat">
+      <a:schemeClr val="tx1"/>
+    </dgm:txFillClrLst>
+    <dgm:txEffectClrLst/>
+  </dgm:styleLbl>
+  <dgm:styleLbl name="parChTrans1D2">
+    <dgm:fillClrLst meth="repeat">
+      <a:schemeClr val="accent1"/>
+    </dgm:fillClrLst>
+    <dgm:linClrLst meth="repeat">
+      <a:schemeClr val="accent1">
+        <a:shade val="60000"/>
+      </a:schemeClr>
+    </dgm:linClrLst>
+    <dgm:effectClrLst/>
+    <dgm:txLinClrLst/>
+    <dgm:txFillClrLst meth="repeat">
+      <a:schemeClr val="tx1"/>
+    </dgm:txFillClrLst>
+    <dgm:txEffectClrLst/>
+  </dgm:styleLbl>
+  <dgm:styleLbl name="parChTrans1D3">
+    <dgm:fillClrLst meth="repeat">
+      <a:schemeClr val="accent1"/>
+    </dgm:fillClrLst>
+    <dgm:linClrLst meth="repeat">
+      <a:schemeClr val="accent1">
+        <a:shade val="80000"/>
+      </a:schemeClr>
+    </dgm:linClrLst>
+    <dgm:effectClrLst/>
+    <dgm:txLinClrLst/>
+    <dgm:txFillClrLst meth="repeat">
+      <a:schemeClr val="tx1"/>
+    </dgm:txFillClrLst>
+    <dgm:txEffectClrLst/>
+  </dgm:styleLbl>
+  <dgm:styleLbl name="parChTrans1D4">
+    <dgm:fillClrLst meth="repeat">
+      <a:schemeClr val="accent1"/>
+    </dgm:fillClrLst>
+    <dgm:linClrLst meth="repeat">
+      <a:schemeClr val="accent1">
+        <a:shade val="80000"/>
+      </a:schemeClr>
+    </dgm:linClrLst>
+    <dgm:effectClrLst/>
+    <dgm:txLinClrLst/>
+    <dgm:txFillClrLst meth="repeat">
+      <a:schemeClr val="tx1"/>
+    </dgm:txFillClrLst>
+    <dgm:txEffectClrLst/>
+  </dgm:styleLbl>
+  <dgm:styleLbl name="fgAcc1">
+    <dgm:fillClrLst meth="repeat">
+      <a:schemeClr val="lt1">
+        <a:alpha val="90000"/>
+      </a:schemeClr>
+    </dgm:fillClrLst>
+    <dgm:linClrLst meth="repeat">
+      <a:schemeClr val="accent1"/>
+    </dgm:linClrLst>
+    <dgm:effectClrLst/>
+    <dgm:txLinClrLst/>
+    <dgm:txFillClrLst meth="repeat">
+      <a:schemeClr val="dk1"/>
+    </dgm:txFillClrLst>
+    <dgm:txEffectClrLst/>
+  </dgm:styleLbl>
+  <dgm:styleLbl name="conFgAcc1">
+    <dgm:fillClrLst meth="repeat">
+      <a:schemeClr val="lt1">
+        <a:alpha val="90000"/>
+      </a:schemeClr>
+    </dgm:fillClrLst>
+    <dgm:linClrLst meth="repeat">
+      <a:schemeClr val="accent1"/>
+    </dgm:linClrLst>
+    <dgm:effectClrLst/>
+    <dgm:txLinClrLst/>
+    <dgm:txFillClrLst meth="repeat">
+      <a:schemeClr val="dk1"/>
+    </dgm:txFillClrLst>
+    <dgm:txEffectClrLst/>
+  </dgm:styleLbl>
+  <dgm:styleLbl name="alignAcc1">
+    <dgm:fillClrLst meth="repeat">
+      <a:schemeClr val="lt1">
+        <a:alpha val="90000"/>
+      </a:schemeClr>
+    </dgm:fillClrLst>
+    <dgm:linClrLst meth="repeat">
+      <a:schemeClr val="accent1"/>
+    </dgm:linClrLst>
+    <dgm:effectClrLst/>
+    <dgm:txLinClrLst/>
+    <dgm:txFillClrLst meth="repeat">
+      <a:schemeClr val="dk1"/>
+    </dgm:txFillClrLst>
+    <dgm:txEffectClrLst/>
+  </dgm:styleLbl>
+  <dgm:styleLbl name="trAlignAcc1">
+    <dgm:fillClrLst meth="repeat">
+      <a:schemeClr val="lt1">
+        <a:alpha val="40000"/>
+      </a:schemeClr>
+    </dgm:fillClrLst>
+    <dgm:linClrLst meth="repeat">
+      <a:schemeClr val="accent1"/>
+    </dgm:linClrLst>
+    <dgm:effectClrLst/>
+    <dgm:txLinClrLst/>
+    <dgm:txFillClrLst meth="repeat">
+      <a:schemeClr val="dk1"/>
+    </dgm:txFillClrLst>
+    <dgm:txEffectClrLst/>
+  </dgm:styleLbl>
+  <dgm:styleLbl name="bgAcc1">
+    <dgm:fillClrLst meth="repeat">
+      <a:schemeClr val="lt1">
+        <a:alpha val="90000"/>
+      </a:schemeClr>
+    </dgm:fillClrLst>
+    <dgm:linClrLst meth="repeat">
+      <a:schemeClr val="accent1"/>
+    </dgm:linClrLst>
+    <dgm:effectClrLst/>
+    <dgm:txLinClrLst/>
+    <dgm:txFillClrLst meth="repeat">
+      <a:schemeClr val="dk1"/>
+    </dgm:txFillClrLst>
+    <dgm:txEffectClrLst/>
+  </dgm:styleLbl>
+  <dgm:styleLbl name="solidFgAcc1">
+    <dgm:fillClrLst meth="repeat">
+      <a:schemeClr val="lt1"/>
+    </dgm:fillClrLst>
+    <dgm:linClrLst meth="repeat">
+      <a:schemeClr val="accent1"/>
+    </dgm:linClrLst>
+    <dgm:effectClrLst/>
+    <dgm:txLinClrLst/>
+    <dgm:txFillClrLst meth="repeat">
+      <a:schemeClr val="dk1"/>
+    </dgm:txFillClrLst>
+    <dgm:txEffectClrLst/>
+  </dgm:styleLbl>
+  <dgm:styleLbl name="solidAlignAcc1">
+    <dgm:fillClrLst meth="repeat">
+      <a:schemeClr val="lt1"/>
+    </dgm:fillClrLst>
+    <dgm:linClrLst meth="repeat">
+      <a:schemeClr val="accent1"/>
+    </dgm:linClrLst>
+    <dgm:effectClrLst/>
+    <dgm:txLinClrLst/>
+    <dgm:txFillClrLst meth="repeat">
+      <a:schemeClr val="dk1"/>
+    </dgm:txFillClrLst>
+    <dgm:txEffectClrLst/>
+  </dgm:styleLbl>
+  <dgm:styleLbl name="solidBgAcc1">
+    <dgm:fillClrLst meth="repeat">
+      <a:schemeClr val="lt1"/>
+    </dgm:fillClrLst>
+    <dgm:linClrLst meth="repeat">
+      <a:schemeClr val="accent1"/>
+    </dgm:linClrLst>
+    <dgm:effectClrLst/>
+    <dgm:txLinClrLst/>
+    <dgm:txFillClrLst meth="repeat">
+      <a:schemeClr val="dk1"/>
+    </dgm:txFillClrLst>
+    <dgm:txEffectClrLst/>
+  </dgm:styleLbl>
+  <dgm:styleLbl name="fgAccFollowNode1">
+    <dgm:fillClrLst meth="repeat">
+      <a:schemeClr val="accent1">
+        <a:alpha val="90000"/>
+        <a:tint val="40000"/>
+      </a:schemeClr>
+    </dgm:fillClrLst>
+    <dgm:linClrLst meth="repeat">
+      <a:schemeClr val="accent1">
+        <a:alpha val="90000"/>
+        <a:tint val="40000"/>
+      </a:schemeClr>
+    </dgm:linClrLst>
+    <dgm:effectClrLst/>
+    <dgm:txLinClrLst/>
+    <dgm:txFillClrLst meth="repeat">
+      <a:schemeClr val="dk1"/>
+    </dgm:txFillClrLst>
+    <dgm:txEffectClrLst/>
+  </dgm:styleLbl>
+  <dgm:styleLbl name="alignAccFollowNode1">
+    <dgm:fillClrLst meth="repeat">
+      <a:schemeClr val="accent1">
+        <a:alpha val="90000"/>
+        <a:tint val="40000"/>
+      </a:schemeClr>
+    </dgm:fillClrLst>
+    <dgm:linClrLst meth="repeat">
+      <a:schemeClr val="accent1">
+        <a:alpha val="90000"/>
+        <a:tint val="40000"/>
+      </a:schemeClr>
+    </dgm:linClrLst>
+    <dgm:effectClrLst/>
+    <dgm:txLinClrLst/>
+    <dgm:txFillClrLst meth="repeat">
+      <a:schemeClr val="dk1"/>
+    </dgm:txFillClrLst>
+    <dgm:txEffectClrLst/>
+  </dgm:styleLbl>
+  <dgm:styleLbl name="bgAccFollowNode1">
+    <dgm:fillClrLst meth="repeat">
+      <a:schemeClr val="accent1">
+        <a:alpha val="90000"/>
+        <a:tint val="40000"/>
+      </a:schemeClr>
+    </dgm:fillClrLst>
+    <dgm:linClrLst meth="repeat">
+      <a:schemeClr val="accent1">
+        <a:alpha val="90000"/>
+        <a:tint val="40000"/>
+      </a:schemeClr>
+    </dgm:linClrLst>
+    <dgm:effectClrLst/>
+    <dgm:txLinClrLst/>
+    <dgm:txFillClrLst meth="repeat">
+      <a:schemeClr val="dk1"/>
+    </dgm:txFillClrLst>
+    <dgm:txEffectClrLst/>
+  </dgm:styleLbl>
+  <dgm:styleLbl name="fgAcc0">
+    <dgm:fillClrLst meth="repeat">
+      <a:schemeClr val="lt1">
+        <a:alpha val="90000"/>
+      </a:schemeClr>
+    </dgm:fillClrLst>
+    <dgm:linClrLst meth="repeat">
+      <a:schemeClr val="accent1"/>
+    </dgm:linClrLst>
+    <dgm:effectClrLst/>
+    <dgm:txLinClrLst/>
+    <dgm:txFillClrLst meth="repeat">
+      <a:schemeClr val="dk1"/>
+    </dgm:txFillClrLst>
+    <dgm:txEffectClrLst/>
+  </dgm:styleLbl>
+  <dgm:styleLbl name="fgAcc2">
+    <dgm:fillClrLst meth="repeat">
+      <a:schemeClr val="lt1">
+        <a:alpha val="90000"/>
+      </a:schemeClr>
+    </dgm:fillClrLst>
+    <dgm:linClrLst meth="repeat">
+      <a:schemeClr val="accent1"/>
+    </dgm:linClrLst>
+    <dgm:effectClrLst/>
+    <dgm:txLinClrLst/>
+    <dgm:txFillClrLst meth="repeat">
+      <a:schemeClr val="dk1"/>
+    </dgm:txFillClrLst>
+    <dgm:txEffectClrLst/>
+  </dgm:styleLbl>
+  <dgm:styleLbl name="fgAcc3">
+    <dgm:fillClrLst meth="repeat">
+      <a:schemeClr val="lt1">
+        <a:alpha val="90000"/>
+      </a:schemeClr>
+    </dgm:fillClrLst>
+    <dgm:linClrLst meth="repeat">
+      <a:schemeClr val="accent1"/>
+    </dgm:linClrLst>
+    <dgm:effectClrLst/>
+    <dgm:txLinClrLst/>
+    <dgm:txFillClrLst meth="repeat">
+      <a:schemeClr val="dk1"/>
+    </dgm:txFillClrLst>
+    <dgm:txEffectClrLst/>
+  </dgm:styleLbl>
+  <dgm:styleLbl name="fgAcc4">
+    <dgm:fillClrLst meth="repeat">
+      <a:schemeClr val="lt1">
+        <a:alpha val="90000"/>
+      </a:schemeClr>
+    </dgm:fillClrLst>
+    <dgm:linClrLst meth="repeat">
+      <a:schemeClr val="accent1"/>
+    </dgm:linClrLst>
+    <dgm:effectClrLst/>
+    <dgm:txLinClrLst/>
+    <dgm:txFillClrLst meth="repeat">
+      <a:schemeClr val="dk1"/>
+    </dgm:txFillClrLst>
+    <dgm:txEffectClrLst/>
+  </dgm:styleLbl>
+  <dgm:styleLbl name="bgShp">
+    <dgm:fillClrLst meth="repeat">
+      <a:schemeClr val="accent1">
+        <a:tint val="40000"/>
+      </a:schemeClr>
+    </dgm:fillClrLst>
+    <dgm:linClrLst meth="repeat">
+      <a:schemeClr val="accent1"/>
+    </dgm:linClrLst>
+    <dgm:effectClrLst/>
+    <dgm:txLinClrLst/>
+    <dgm:txFillClrLst meth="repeat">
+      <a:schemeClr val="dk1"/>
+    </dgm:txFillClrLst>
+    <dgm:txEffectClrLst/>
+  </dgm:styleLbl>
+  <dgm:styleLbl name="dkBgShp">
+    <dgm:fillClrLst meth="repeat">
+      <a:schemeClr val="accent1">
+        <a:shade val="80000"/>
+      </a:schemeClr>
+    </dgm:fillClrLst>
+    <dgm:linClrLst meth="repeat">
+      <a:schemeClr val="accent1"/>
+    </dgm:linClrLst>
+    <dgm:effectClrLst/>
+    <dgm:txLinClrLst/>
+    <dgm:txFillClrLst meth="repeat">
+      <a:schemeClr val="lt1"/>
+    </dgm:txFillClrLst>
+    <dgm:txEffectClrLst/>
+  </dgm:styleLbl>
+  <dgm:styleLbl name="trBgShp">
+    <dgm:fillClrLst meth="repeat">
+      <a:schemeClr val="accent1">
+        <a:tint val="50000"/>
+        <a:alpha val="40000"/>
+      </a:schemeClr>
+    </dgm:fillClrLst>
+    <dgm:linClrLst meth="repeat">
+      <a:schemeClr val="accent1"/>
+    </dgm:linClrLst>
+    <dgm:effectClrLst/>
+    <dgm:txLinClrLst/>
+    <dgm:txFillClrLst meth="repeat">
+      <a:schemeClr val="lt1"/>
+    </dgm:txFillClrLst>
+    <dgm:txEffectClrLst/>
+  </dgm:styleLbl>
+  <dgm:styleLbl name="fgShp">
+    <dgm:fillClrLst meth="repeat">
+      <a:schemeClr val="accent1">
+        <a:tint val="60000"/>
+      </a:schemeClr>
+    </dgm:fillClrLst>
+    <dgm:linClrLst meth="repeat">
+      <a:schemeClr val="lt1"/>
+    </dgm:linClrLst>
+    <dgm:effectClrLst/>
+    <dgm:txLinClrLst/>
+    <dgm:txFillClrLst meth="repeat">
+      <a:schemeClr val="dk1"/>
+    </dgm:txFillClrLst>
+    <dgm:txEffectClrLst/>
+  </dgm:styleLbl>
+  <dgm:styleLbl name="revTx">
+    <dgm:fillClrLst meth="repeat">
+      <a:schemeClr val="lt1">
+        <a:alpha val="0"/>
+      </a:schemeClr>
+    </dgm:fillClrLst>
+    <dgm:linClrLst meth="repeat">
+      <a:schemeClr val="dk1">
+        <a:alpha val="0"/>
+      </a:schemeClr>
+    </dgm:linClrLst>
+    <dgm:effectClrLst/>
+    <dgm:txLinClrLst/>
+    <dgm:txFillClrLst meth="repeat">
+      <a:schemeClr val="tx1"/>
+    </dgm:txFillClrLst>
+    <dgm:txEffectClrLst/>
+  </dgm:styleLbl>
+</dgm:colorsDef>
+</file>
+
+<file path=ppt/diagrams/data1.xml><?xml version="1.0" encoding="utf-8"?>
+<dgm:dataModel xmlns:dgm="http://schemas.openxmlformats.org/drawingml/2006/diagram" xmlns:a="http://schemas.openxmlformats.org/drawingml/2006/main">
+  <dgm:ptLst>
+    <dgm:pt modelId="{773E2DB8-5EAA-4F66-BA2B-4342DC7DD4AC}" type="doc">
+      <dgm:prSet loTypeId="urn:microsoft.com/office/officeart/2005/8/layout/process1" loCatId="process" qsTypeId="urn:microsoft.com/office/officeart/2005/8/quickstyle/simple1" qsCatId="simple" csTypeId="urn:microsoft.com/office/officeart/2005/8/colors/accent1_2" csCatId="accent1" phldr="1"/>
+      <dgm:spPr/>
+    </dgm:pt>
+    <dgm:pt modelId="{6C5CEB4A-A9BD-407F-B8EA-47317CB379C7}">
+      <dgm:prSet phldrT="[Text]"/>
+      <dgm:spPr/>
+      <dgm:t>
+        <a:bodyPr/>
+        <a:lstStyle/>
+        <a:p>
+          <a:r>
+            <a:rPr lang="da-DK" dirty="0">
+              <a:solidFill>
+                <a:srgbClr val="555F6D"/>
+              </a:solidFill>
+            </a:rPr>
+            <a:t>{{Name}}</a:t>
+          </a:r>
+          <a:endParaRPr lang="da-DK" dirty="0"/>
+        </a:p>
+      </dgm:t>
+    </dgm:pt>
+    <dgm:pt modelId="{37896826-2320-4826-BF39-45B6C826975D}" type="parTrans" cxnId="{AC4F4CD8-4524-494A-99AF-20367BD6B183}">
+      <dgm:prSet/>
+      <dgm:spPr/>
+      <dgm:t>
+        <a:bodyPr/>
+        <a:lstStyle/>
+        <a:p>
+          <a:endParaRPr lang="da-DK"/>
+        </a:p>
+      </dgm:t>
+    </dgm:pt>
+    <dgm:pt modelId="{13B3A664-7638-4EAA-81D6-2443A1E61C97}" type="sibTrans" cxnId="{AC4F4CD8-4524-494A-99AF-20367BD6B183}">
+      <dgm:prSet/>
+      <dgm:spPr/>
+      <dgm:t>
+        <a:bodyPr/>
+        <a:lstStyle/>
+        <a:p>
+          <a:endParaRPr lang="da-DK"/>
+        </a:p>
+      </dgm:t>
+    </dgm:pt>
+    <dgm:pt modelId="{A2FC36DB-97D1-414B-BDBB-9146087EB5DD}">
+      <dgm:prSet phldrT="[Text]"/>
+      <dgm:spPr/>
+      <dgm:t>
+        <a:bodyPr/>
+        <a:lstStyle/>
+        <a:p>
+          <a:r>
+            <a:rPr lang="da-DK" dirty="0">
+              <a:solidFill>
+                <a:srgbClr val="555F6D"/>
+              </a:solidFill>
+            </a:rPr>
+            <a:t>{{</a:t>
+          </a:r>
+          <a:r>
+            <a:rPr lang="da-DK">
+              <a:solidFill>
+                <a:srgbClr val="555F6D"/>
+              </a:solidFill>
+            </a:rPr>
+            <a:t>Region}}</a:t>
+          </a:r>
+          <a:endParaRPr lang="da-DK" dirty="0"/>
+        </a:p>
+      </dgm:t>
+    </dgm:pt>
+    <dgm:pt modelId="{1C594D9B-52B4-42FD-BC1B-3833E4FA2589}" type="parTrans" cxnId="{2E45F047-B432-4011-AF0F-4F70642431B6}">
+      <dgm:prSet/>
+      <dgm:spPr/>
+      <dgm:t>
+        <a:bodyPr/>
+        <a:lstStyle/>
+        <a:p>
+          <a:endParaRPr lang="da-DK"/>
+        </a:p>
+      </dgm:t>
+    </dgm:pt>
+    <dgm:pt modelId="{F8F069AD-59E6-4777-AEAE-C0EFA3F4BDDE}" type="sibTrans" cxnId="{2E45F047-B432-4011-AF0F-4F70642431B6}">
+      <dgm:prSet/>
+      <dgm:spPr/>
+      <dgm:t>
+        <a:bodyPr/>
+        <a:lstStyle/>
+        <a:p>
+          <a:endParaRPr lang="da-DK"/>
+        </a:p>
+      </dgm:t>
+    </dgm:pt>
+    <dgm:pt modelId="{BF9675D7-9E1F-4BA0-89AD-C594E268D624}">
+      <dgm:prSet phldrT="[Text]"/>
+      <dgm:spPr/>
+      <dgm:t>
+        <a:bodyPr/>
+        <a:lstStyle/>
+        <a:p>
+          <a:r>
+            <a:rPr lang="da-DK">
+              <a:solidFill>
+                <a:srgbClr val="555F6D"/>
+              </a:solidFill>
+            </a:rPr>
+            <a:t>Renewal {{Renewal|date:d MMM}}</a:t>
+          </a:r>
+          <a:endParaRPr lang="da-DK" dirty="0"/>
+        </a:p>
+      </dgm:t>
+    </dgm:pt>
+    <dgm:pt modelId="{B6A3FBFC-36C6-4E07-980F-9202589651AD}" type="parTrans" cxnId="{97484434-9E33-4698-AB21-6358FA94DE7F}">
+      <dgm:prSet/>
+      <dgm:spPr/>
+      <dgm:t>
+        <a:bodyPr/>
+        <a:lstStyle/>
+        <a:p>
+          <a:endParaRPr lang="da-DK"/>
+        </a:p>
+      </dgm:t>
+    </dgm:pt>
+    <dgm:pt modelId="{8F133D0C-9015-416C-99EE-829F11D29285}" type="sibTrans" cxnId="{97484434-9E33-4698-AB21-6358FA94DE7F}">
+      <dgm:prSet/>
+      <dgm:spPr/>
+      <dgm:t>
+        <a:bodyPr/>
+        <a:lstStyle/>
+        <a:p>
+          <a:endParaRPr lang="da-DK"/>
+        </a:p>
+      </dgm:t>
+    </dgm:pt>
+    <dgm:pt modelId="{0D753910-FAA2-4919-A24A-7591C14DF75C}" type="pres">
+      <dgm:prSet presAssocID="{773E2DB8-5EAA-4F66-BA2B-4342DC7DD4AC}" presName="Name0" presStyleCnt="0">
+        <dgm:presLayoutVars>
+          <dgm:dir/>
+          <dgm:resizeHandles val="exact"/>
+        </dgm:presLayoutVars>
+      </dgm:prSet>
+      <dgm:spPr/>
+    </dgm:pt>
+    <dgm:pt modelId="{2C2F9DAB-5A89-48AB-A8B2-83B4D7D827AF}" type="pres">
+      <dgm:prSet presAssocID="{6C5CEB4A-A9BD-407F-B8EA-47317CB379C7}" presName="node" presStyleLbl="node1" presStyleIdx="0" presStyleCnt="3">
+        <dgm:presLayoutVars>
+          <dgm:bulletEnabled val="1"/>
+        </dgm:presLayoutVars>
+      </dgm:prSet>
+      <dgm:spPr/>
+    </dgm:pt>
+    <dgm:pt modelId="{ECAD69D8-EC9D-4470-AE0C-4551FB5363F0}" type="pres">
+      <dgm:prSet presAssocID="{13B3A664-7638-4EAA-81D6-2443A1E61C97}" presName="sibTrans" presStyleLbl="sibTrans2D1" presStyleIdx="0" presStyleCnt="2"/>
+      <dgm:spPr/>
+    </dgm:pt>
+    <dgm:pt modelId="{9E6AD052-601A-4684-B998-5D9C579EF72D}" type="pres">
+      <dgm:prSet presAssocID="{13B3A664-7638-4EAA-81D6-2443A1E61C97}" presName="connectorText" presStyleLbl="sibTrans2D1" presStyleIdx="0" presStyleCnt="2"/>
+      <dgm:spPr/>
+    </dgm:pt>
+    <dgm:pt modelId="{CAF44A5B-6687-45FB-B7F1-9D0433C8C516}" type="pres">
+      <dgm:prSet presAssocID="{A2FC36DB-97D1-414B-BDBB-9146087EB5DD}" presName="node" presStyleLbl="node1" presStyleIdx="1" presStyleCnt="3">
+        <dgm:presLayoutVars>
+          <dgm:bulletEnabled val="1"/>
+        </dgm:presLayoutVars>
+      </dgm:prSet>
+      <dgm:spPr/>
+    </dgm:pt>
+    <dgm:pt modelId="{D484C448-BD5F-4A30-8795-DF0972B52AE1}" type="pres">
+      <dgm:prSet presAssocID="{F8F069AD-59E6-4777-AEAE-C0EFA3F4BDDE}" presName="sibTrans" presStyleLbl="sibTrans2D1" presStyleIdx="1" presStyleCnt="2"/>
+      <dgm:spPr/>
+    </dgm:pt>
+    <dgm:pt modelId="{C80DC081-3C87-43EE-A838-BC9FD45FDC16}" type="pres">
+      <dgm:prSet presAssocID="{F8F069AD-59E6-4777-AEAE-C0EFA3F4BDDE}" presName="connectorText" presStyleLbl="sibTrans2D1" presStyleIdx="1" presStyleCnt="2"/>
+      <dgm:spPr/>
+    </dgm:pt>
+    <dgm:pt modelId="{B3974E45-0128-4B64-AA90-3684E073F6A2}" type="pres">
+      <dgm:prSet presAssocID="{BF9675D7-9E1F-4BA0-89AD-C594E268D624}" presName="node" presStyleLbl="node1" presStyleIdx="2" presStyleCnt="3">
+        <dgm:presLayoutVars>
+          <dgm:bulletEnabled val="1"/>
+        </dgm:presLayoutVars>
+      </dgm:prSet>
+      <dgm:spPr/>
+    </dgm:pt>
+  </dgm:ptLst>
+  <dgm:cxnLst>
+    <dgm:cxn modelId="{AAEAE503-2024-41F3-9ECA-EAC4633C88EB}" type="presOf" srcId="{6C5CEB4A-A9BD-407F-B8EA-47317CB379C7}" destId="{2C2F9DAB-5A89-48AB-A8B2-83B4D7D827AF}" srcOrd="0" destOrd="0" presId="urn:microsoft.com/office/officeart/2005/8/layout/process1"/>
+    <dgm:cxn modelId="{97484434-9E33-4698-AB21-6358FA94DE7F}" srcId="{773E2DB8-5EAA-4F66-BA2B-4342DC7DD4AC}" destId="{BF9675D7-9E1F-4BA0-89AD-C594E268D624}" srcOrd="2" destOrd="0" parTransId="{B6A3FBFC-36C6-4E07-980F-9202589651AD}" sibTransId="{8F133D0C-9015-416C-99EE-829F11D29285}"/>
+    <dgm:cxn modelId="{2E45F047-B432-4011-AF0F-4F70642431B6}" srcId="{773E2DB8-5EAA-4F66-BA2B-4342DC7DD4AC}" destId="{A2FC36DB-97D1-414B-BDBB-9146087EB5DD}" srcOrd="1" destOrd="0" parTransId="{1C594D9B-52B4-42FD-BC1B-3833E4FA2589}" sibTransId="{F8F069AD-59E6-4777-AEAE-C0EFA3F4BDDE}"/>
+    <dgm:cxn modelId="{7A30F877-15D8-42F9-A7F1-93676033C780}" type="presOf" srcId="{773E2DB8-5EAA-4F66-BA2B-4342DC7DD4AC}" destId="{0D753910-FAA2-4919-A24A-7591C14DF75C}" srcOrd="0" destOrd="0" presId="urn:microsoft.com/office/officeart/2005/8/layout/process1"/>
+    <dgm:cxn modelId="{858E9E96-BF4D-45FA-A0C8-986C39CC088A}" type="presOf" srcId="{13B3A664-7638-4EAA-81D6-2443A1E61C97}" destId="{ECAD69D8-EC9D-4470-AE0C-4551FB5363F0}" srcOrd="0" destOrd="0" presId="urn:microsoft.com/office/officeart/2005/8/layout/process1"/>
+    <dgm:cxn modelId="{BC68559C-202E-407A-BB64-E6F7DFFD7174}" type="presOf" srcId="{F8F069AD-59E6-4777-AEAE-C0EFA3F4BDDE}" destId="{D484C448-BD5F-4A30-8795-DF0972B52AE1}" srcOrd="0" destOrd="0" presId="urn:microsoft.com/office/officeart/2005/8/layout/process1"/>
+    <dgm:cxn modelId="{6F2EB7A5-B952-48C8-86DE-166B6C085ED3}" type="presOf" srcId="{13B3A664-7638-4EAA-81D6-2443A1E61C97}" destId="{9E6AD052-601A-4684-B998-5D9C579EF72D}" srcOrd="1" destOrd="0" presId="urn:microsoft.com/office/officeart/2005/8/layout/process1"/>
+    <dgm:cxn modelId="{F83761B1-8E3B-4435-9927-AAA27F930A7D}" type="presOf" srcId="{A2FC36DB-97D1-414B-BDBB-9146087EB5DD}" destId="{CAF44A5B-6687-45FB-B7F1-9D0433C8C516}" srcOrd="0" destOrd="0" presId="urn:microsoft.com/office/officeart/2005/8/layout/process1"/>
+    <dgm:cxn modelId="{05A192B4-421E-4CE8-8746-48584BBEE7AC}" type="presOf" srcId="{BF9675D7-9E1F-4BA0-89AD-C594E268D624}" destId="{B3974E45-0128-4B64-AA90-3684E073F6A2}" srcOrd="0" destOrd="0" presId="urn:microsoft.com/office/officeart/2005/8/layout/process1"/>
+    <dgm:cxn modelId="{3D7D14C6-C4E4-4F1D-8672-5A1DCB65B0D0}" type="presOf" srcId="{F8F069AD-59E6-4777-AEAE-C0EFA3F4BDDE}" destId="{C80DC081-3C87-43EE-A838-BC9FD45FDC16}" srcOrd="1" destOrd="0" presId="urn:microsoft.com/office/officeart/2005/8/layout/process1"/>
+    <dgm:cxn modelId="{AC4F4CD8-4524-494A-99AF-20367BD6B183}" srcId="{773E2DB8-5EAA-4F66-BA2B-4342DC7DD4AC}" destId="{6C5CEB4A-A9BD-407F-B8EA-47317CB379C7}" srcOrd="0" destOrd="0" parTransId="{37896826-2320-4826-BF39-45B6C826975D}" sibTransId="{13B3A664-7638-4EAA-81D6-2443A1E61C97}"/>
+    <dgm:cxn modelId="{FE52C768-D2CD-4483-8BF8-BE369A142510}" type="presParOf" srcId="{0D753910-FAA2-4919-A24A-7591C14DF75C}" destId="{2C2F9DAB-5A89-48AB-A8B2-83B4D7D827AF}" srcOrd="0" destOrd="0" presId="urn:microsoft.com/office/officeart/2005/8/layout/process1"/>
+    <dgm:cxn modelId="{5497FB8C-B79C-416C-B88E-7066B642E7FD}" type="presParOf" srcId="{0D753910-FAA2-4919-A24A-7591C14DF75C}" destId="{ECAD69D8-EC9D-4470-AE0C-4551FB5363F0}" srcOrd="1" destOrd="0" presId="urn:microsoft.com/office/officeart/2005/8/layout/process1"/>
+    <dgm:cxn modelId="{B37BDF96-4C7F-438C-B5DC-0DFCA17226FA}" type="presParOf" srcId="{ECAD69D8-EC9D-4470-AE0C-4551FB5363F0}" destId="{9E6AD052-601A-4684-B998-5D9C579EF72D}" srcOrd="0" destOrd="0" presId="urn:microsoft.com/office/officeart/2005/8/layout/process1"/>
+    <dgm:cxn modelId="{014C55C3-E529-474A-AB89-EBA1F25EDAE7}" type="presParOf" srcId="{0D753910-FAA2-4919-A24A-7591C14DF75C}" destId="{CAF44A5B-6687-45FB-B7F1-9D0433C8C516}" srcOrd="2" destOrd="0" presId="urn:microsoft.com/office/officeart/2005/8/layout/process1"/>
+    <dgm:cxn modelId="{72DB4BC8-D0B8-438B-9F6C-BCEAACCA755E}" type="presParOf" srcId="{0D753910-FAA2-4919-A24A-7591C14DF75C}" destId="{D484C448-BD5F-4A30-8795-DF0972B52AE1}" srcOrd="3" destOrd="0" presId="urn:microsoft.com/office/officeart/2005/8/layout/process1"/>
+    <dgm:cxn modelId="{644281FA-0644-4D72-A5F0-252686A05E66}" type="presParOf" srcId="{D484C448-BD5F-4A30-8795-DF0972B52AE1}" destId="{C80DC081-3C87-43EE-A838-BC9FD45FDC16}" srcOrd="0" destOrd="0" presId="urn:microsoft.com/office/officeart/2005/8/layout/process1"/>
+    <dgm:cxn modelId="{B87A4F3C-7C0F-4849-81DD-2FD6511A6D9F}" type="presParOf" srcId="{0D753910-FAA2-4919-A24A-7591C14DF75C}" destId="{B3974E45-0128-4B64-AA90-3684E073F6A2}" srcOrd="4" destOrd="0" presId="urn:microsoft.com/office/officeart/2005/8/layout/process1"/>
+  </dgm:cxnLst>
+  <dgm:bg/>
+  <dgm:whole/>
+  <dgm:extLst>
+    <a:ext uri="http://schemas.microsoft.com/office/drawing/2008/diagram">
+      <dsp:dataModelExt xmlns:dsp="http://schemas.microsoft.com/office/drawing/2008/diagram" relId="rId6" minVer="http://schemas.openxmlformats.org/drawingml/2006/diagram"/>
+    </a:ext>
+  </dgm:extLst>
+</dgm:dataModel>
+</file>
+
+<file path=ppt/diagrams/drawing1.xml><?xml version="1.0" encoding="utf-8"?>
+<dsp:drawing xmlns:dgm="http://schemas.openxmlformats.org/drawingml/2006/diagram" xmlns:dsp="http://schemas.microsoft.com/office/drawing/2008/diagram" xmlns:a="http://schemas.openxmlformats.org/drawingml/2006/main">
+  <dsp:spTree>
+    <dsp:nvGrpSpPr>
+      <dsp:cNvPr id="0" name=""/>
+      <dsp:cNvGrpSpPr/>
+    </dsp:nvGrpSpPr>
+    <dsp:grpSpPr/>
+    <dsp:sp modelId="{2C2F9DAB-5A89-48AB-A8B2-83B4D7D827AF}">
+      <dsp:nvSpPr>
+        <dsp:cNvPr id="0" name=""/>
+        <dsp:cNvSpPr/>
+      </dsp:nvSpPr>
+      <dsp:spPr>
+        <a:xfrm>
+          <a:off x="7143" y="2068777"/>
+          <a:ext cx="2135187" cy="1281112"/>
+        </a:xfrm>
+        <a:prstGeom prst="roundRect">
+          <a:avLst>
+            <a:gd name="adj" fmla="val 10000"/>
+          </a:avLst>
+        </a:prstGeom>
+        <a:solidFill>
+          <a:schemeClr val="accent1">
+            <a:hueOff val="0"/>
+            <a:satOff val="0"/>
+            <a:lumOff val="0"/>
+            <a:alphaOff val="0"/>
+          </a:schemeClr>
+        </a:solidFill>
+        <a:ln w="25400" cap="flat" cmpd="sng" algn="ctr">
+          <a:solidFill>
+            <a:schemeClr val="lt1">
+              <a:hueOff val="0"/>
+              <a:satOff val="0"/>
+              <a:lumOff val="0"/>
+              <a:alphaOff val="0"/>
+            </a:schemeClr>
+          </a:solidFill>
+          <a:prstDash val="solid"/>
+        </a:ln>
+        <a:effectLst/>
+      </dsp:spPr>
+      <dsp:style>
+        <a:lnRef idx="2">
+          <a:scrgbClr r="0" g="0" b="0"/>
+        </a:lnRef>
+        <a:fillRef idx="1">
+          <a:scrgbClr r="0" g="0" b="0"/>
+        </a:fillRef>
+        <a:effectRef idx="0">
+          <a:scrgbClr r="0" g="0" b="0"/>
+        </a:effectRef>
+        <a:fontRef idx="minor">
+          <a:schemeClr val="lt1"/>
+        </a:fontRef>
+      </dsp:style>
+      <dsp:txBody>
+        <a:bodyPr spcFirstLastPara="0" vert="horz" wrap="square" lIns="76200" tIns="76200" rIns="76200" bIns="76200" numCol="1" spcCol="1270" anchor="ctr" anchorCtr="0">
+          <a:noAutofit/>
+        </a:bodyPr>
+        <a:lstStyle/>
+        <a:p>
+          <a:pPr marL="0" lvl="0" indent="0" algn="ctr" defTabSz="889000">
+            <a:lnSpc>
+              <a:spcPct val="90000"/>
+            </a:lnSpc>
+            <a:spcBef>
+              <a:spcPct val="0"/>
+            </a:spcBef>
+            <a:spcAft>
+              <a:spcPct val="35000"/>
+            </a:spcAft>
+            <a:buNone/>
+          </a:pPr>
+          <a:r>
+            <a:rPr lang="da-DK" sz="2000" kern="1200" dirty="0">
+              <a:solidFill>
+                <a:srgbClr val="555F6D"/>
+              </a:solidFill>
+            </a:rPr>
+            <a:t>{{Name}}</a:t>
+          </a:r>
+          <a:endParaRPr lang="da-DK" sz="2000" kern="1200" dirty="0"/>
+        </a:p>
+      </dsp:txBody>
+      <dsp:txXfrm>
+        <a:off x="44665" y="2106299"/>
+        <a:ext cx="2060143" cy="1206068"/>
+      </dsp:txXfrm>
+    </dsp:sp>
+    <dsp:sp modelId="{ECAD69D8-EC9D-4470-AE0C-4551FB5363F0}">
+      <dsp:nvSpPr>
+        <dsp:cNvPr id="0" name=""/>
+        <dsp:cNvSpPr/>
+      </dsp:nvSpPr>
+      <dsp:spPr>
+        <a:xfrm>
+          <a:off x="2355850" y="2444570"/>
+          <a:ext cx="452659" cy="529526"/>
+        </a:xfrm>
+        <a:prstGeom prst="rightArrow">
+          <a:avLst>
+            <a:gd name="adj1" fmla="val 60000"/>
+            <a:gd name="adj2" fmla="val 50000"/>
+          </a:avLst>
+        </a:prstGeom>
+        <a:solidFill>
+          <a:schemeClr val="accent1">
+            <a:tint val="60000"/>
+            <a:hueOff val="0"/>
+            <a:satOff val="0"/>
+            <a:lumOff val="0"/>
+            <a:alphaOff val="0"/>
+          </a:schemeClr>
+        </a:solidFill>
+        <a:ln>
+          <a:noFill/>
+        </a:ln>
+        <a:effectLst/>
+      </dsp:spPr>
+      <dsp:style>
+        <a:lnRef idx="0">
+          <a:scrgbClr r="0" g="0" b="0"/>
+        </a:lnRef>
+        <a:fillRef idx="1">
+          <a:scrgbClr r="0" g="0" b="0"/>
+        </a:fillRef>
+        <a:effectRef idx="0">
+          <a:scrgbClr r="0" g="0" b="0"/>
+        </a:effectRef>
+        <a:fontRef idx="minor">
+          <a:schemeClr val="lt1"/>
+        </a:fontRef>
+      </dsp:style>
+      <dsp:txBody>
+        <a:bodyPr spcFirstLastPara="0" vert="horz" wrap="square" lIns="0" tIns="0" rIns="0" bIns="0" numCol="1" spcCol="1270" anchor="ctr" anchorCtr="0">
+          <a:noAutofit/>
+        </a:bodyPr>
+        <a:lstStyle/>
+        <a:p>
+          <a:pPr marL="0" lvl="0" indent="0" algn="ctr" defTabSz="711200">
+            <a:lnSpc>
+              <a:spcPct val="90000"/>
+            </a:lnSpc>
+            <a:spcBef>
+              <a:spcPct val="0"/>
+            </a:spcBef>
+            <a:spcAft>
+              <a:spcPct val="35000"/>
+            </a:spcAft>
+            <a:buNone/>
+          </a:pPr>
+          <a:endParaRPr lang="da-DK" sz="1600" kern="1200"/>
+        </a:p>
+      </dsp:txBody>
+      <dsp:txXfrm>
+        <a:off x="2355850" y="2550475"/>
+        <a:ext cx="316861" cy="317716"/>
+      </dsp:txXfrm>
+    </dsp:sp>
+    <dsp:sp modelId="{CAF44A5B-6687-45FB-B7F1-9D0433C8C516}">
+      <dsp:nvSpPr>
+        <dsp:cNvPr id="0" name=""/>
+        <dsp:cNvSpPr/>
+      </dsp:nvSpPr>
+      <dsp:spPr>
+        <a:xfrm>
+          <a:off x="2996406" y="2068777"/>
+          <a:ext cx="2135187" cy="1281112"/>
+        </a:xfrm>
+        <a:prstGeom prst="roundRect">
+          <a:avLst>
+            <a:gd name="adj" fmla="val 10000"/>
+          </a:avLst>
+        </a:prstGeom>
+        <a:solidFill>
+          <a:schemeClr val="accent1">
+            <a:hueOff val="0"/>
+            <a:satOff val="0"/>
+            <a:lumOff val="0"/>
+            <a:alphaOff val="0"/>
+          </a:schemeClr>
+        </a:solidFill>
+        <a:ln w="25400" cap="flat" cmpd="sng" algn="ctr">
+          <a:solidFill>
+            <a:schemeClr val="lt1">
+              <a:hueOff val="0"/>
+              <a:satOff val="0"/>
+              <a:lumOff val="0"/>
+              <a:alphaOff val="0"/>
+            </a:schemeClr>
+          </a:solidFill>
+          <a:prstDash val="solid"/>
+        </a:ln>
+        <a:effectLst/>
+      </dsp:spPr>
+      <dsp:style>
+        <a:lnRef idx="2">
+          <a:scrgbClr r="0" g="0" b="0"/>
+        </a:lnRef>
+        <a:fillRef idx="1">
+          <a:scrgbClr r="0" g="0" b="0"/>
+        </a:fillRef>
+        <a:effectRef idx="0">
+          <a:scrgbClr r="0" g="0" b="0"/>
+        </a:effectRef>
+        <a:fontRef idx="minor">
+          <a:schemeClr val="lt1"/>
+        </a:fontRef>
+      </dsp:style>
+      <dsp:txBody>
+        <a:bodyPr spcFirstLastPara="0" vert="horz" wrap="square" lIns="76200" tIns="76200" rIns="76200" bIns="76200" numCol="1" spcCol="1270" anchor="ctr" anchorCtr="0">
+          <a:noAutofit/>
+        </a:bodyPr>
+        <a:lstStyle/>
+        <a:p>
+          <a:pPr marL="0" lvl="0" indent="0" algn="ctr" defTabSz="889000">
+            <a:lnSpc>
+              <a:spcPct val="90000"/>
+            </a:lnSpc>
+            <a:spcBef>
+              <a:spcPct val="0"/>
+            </a:spcBef>
+            <a:spcAft>
+              <a:spcPct val="35000"/>
+            </a:spcAft>
+            <a:buNone/>
+          </a:pPr>
+          <a:r>
+            <a:rPr lang="da-DK" sz="2000" kern="1200" dirty="0">
+              <a:solidFill>
+                <a:srgbClr val="555F6D"/>
+              </a:solidFill>
+            </a:rPr>
+            <a:t>{{</a:t>
+          </a:r>
+          <a:r>
+            <a:rPr lang="da-DK" sz="2000" kern="1200">
+              <a:solidFill>
+                <a:srgbClr val="555F6D"/>
+              </a:solidFill>
+            </a:rPr>
+            <a:t>Region}}</a:t>
+          </a:r>
+          <a:endParaRPr lang="da-DK" sz="2000" kern="1200" dirty="0"/>
+        </a:p>
+      </dsp:txBody>
+      <dsp:txXfrm>
+        <a:off x="3033928" y="2106299"/>
+        <a:ext cx="2060143" cy="1206068"/>
+      </dsp:txXfrm>
+    </dsp:sp>
+    <dsp:sp modelId="{D484C448-BD5F-4A30-8795-DF0972B52AE1}">
+      <dsp:nvSpPr>
+        <dsp:cNvPr id="0" name=""/>
+        <dsp:cNvSpPr/>
+      </dsp:nvSpPr>
+      <dsp:spPr>
+        <a:xfrm>
+          <a:off x="5345112" y="2444570"/>
+          <a:ext cx="452659" cy="529526"/>
+        </a:xfrm>
+        <a:prstGeom prst="rightArrow">
+          <a:avLst>
+            <a:gd name="adj1" fmla="val 60000"/>
+            <a:gd name="adj2" fmla="val 50000"/>
+          </a:avLst>
+        </a:prstGeom>
+        <a:solidFill>
+          <a:schemeClr val="accent1">
+            <a:tint val="60000"/>
+            <a:hueOff val="0"/>
+            <a:satOff val="0"/>
+            <a:lumOff val="0"/>
+            <a:alphaOff val="0"/>
+          </a:schemeClr>
+        </a:solidFill>
+        <a:ln>
+          <a:noFill/>
+        </a:ln>
+        <a:effectLst/>
+      </dsp:spPr>
+      <dsp:style>
+        <a:lnRef idx="0">
+          <a:scrgbClr r="0" g="0" b="0"/>
+        </a:lnRef>
+        <a:fillRef idx="1">
+          <a:scrgbClr r="0" g="0" b="0"/>
+        </a:fillRef>
+        <a:effectRef idx="0">
+          <a:scrgbClr r="0" g="0" b="0"/>
+        </a:effectRef>
+        <a:fontRef idx="minor">
+          <a:schemeClr val="lt1"/>
+        </a:fontRef>
+      </dsp:style>
+      <dsp:txBody>
+        <a:bodyPr spcFirstLastPara="0" vert="horz" wrap="square" lIns="0" tIns="0" rIns="0" bIns="0" numCol="1" spcCol="1270" anchor="ctr" anchorCtr="0">
+          <a:noAutofit/>
+        </a:bodyPr>
+        <a:lstStyle/>
+        <a:p>
+          <a:pPr marL="0" lvl="0" indent="0" algn="ctr" defTabSz="711200">
+            <a:lnSpc>
+              <a:spcPct val="90000"/>
+            </a:lnSpc>
+            <a:spcBef>
+              <a:spcPct val="0"/>
+            </a:spcBef>
+            <a:spcAft>
+              <a:spcPct val="35000"/>
+            </a:spcAft>
+            <a:buNone/>
+          </a:pPr>
+          <a:endParaRPr lang="da-DK" sz="1600" kern="1200"/>
+        </a:p>
+      </dsp:txBody>
+      <dsp:txXfrm>
+        <a:off x="5345112" y="2550475"/>
+        <a:ext cx="316861" cy="317716"/>
+      </dsp:txXfrm>
+    </dsp:sp>
+    <dsp:sp modelId="{B3974E45-0128-4B64-AA90-3684E073F6A2}">
+      <dsp:nvSpPr>
+        <dsp:cNvPr id="0" name=""/>
+        <dsp:cNvSpPr/>
+      </dsp:nvSpPr>
+      <dsp:spPr>
+        <a:xfrm>
+          <a:off x="5985668" y="2068777"/>
+          <a:ext cx="2135187" cy="1281112"/>
+        </a:xfrm>
+        <a:prstGeom prst="roundRect">
+          <a:avLst>
+            <a:gd name="adj" fmla="val 10000"/>
+          </a:avLst>
+        </a:prstGeom>
+        <a:solidFill>
+          <a:schemeClr val="accent1">
+            <a:hueOff val="0"/>
+            <a:satOff val="0"/>
+            <a:lumOff val="0"/>
+            <a:alphaOff val="0"/>
+          </a:schemeClr>
+        </a:solidFill>
+        <a:ln w="25400" cap="flat" cmpd="sng" algn="ctr">
+          <a:solidFill>
+            <a:schemeClr val="lt1">
+              <a:hueOff val="0"/>
+              <a:satOff val="0"/>
+              <a:lumOff val="0"/>
+              <a:alphaOff val="0"/>
+            </a:schemeClr>
+          </a:solidFill>
+          <a:prstDash val="solid"/>
+        </a:ln>
+        <a:effectLst/>
+      </dsp:spPr>
+      <dsp:style>
+        <a:lnRef idx="2">
+          <a:scrgbClr r="0" g="0" b="0"/>
+        </a:lnRef>
+        <a:fillRef idx="1">
+          <a:scrgbClr r="0" g="0" b="0"/>
+        </a:fillRef>
+        <a:effectRef idx="0">
+          <a:scrgbClr r="0" g="0" b="0"/>
+        </a:effectRef>
+        <a:fontRef idx="minor">
+          <a:schemeClr val="lt1"/>
+        </a:fontRef>
+      </dsp:style>
+      <dsp:txBody>
+        <a:bodyPr spcFirstLastPara="0" vert="horz" wrap="square" lIns="76200" tIns="76200" rIns="76200" bIns="76200" numCol="1" spcCol="1270" anchor="ctr" anchorCtr="0">
+          <a:noAutofit/>
+        </a:bodyPr>
+        <a:lstStyle/>
+        <a:p>
+          <a:pPr marL="0" lvl="0" indent="0" algn="ctr" defTabSz="889000">
+            <a:lnSpc>
+              <a:spcPct val="90000"/>
+            </a:lnSpc>
+            <a:spcBef>
+              <a:spcPct val="0"/>
+            </a:spcBef>
+            <a:spcAft>
+              <a:spcPct val="35000"/>
+            </a:spcAft>
+            <a:buNone/>
+          </a:pPr>
+          <a:r>
+            <a:rPr lang="da-DK" sz="2000" kern="1200">
+              <a:solidFill>
+                <a:srgbClr val="555F6D"/>
+              </a:solidFill>
+            </a:rPr>
+            <a:t>Renewal {{Renewal|date:d MMM}}</a:t>
+          </a:r>
+          <a:endParaRPr lang="da-DK" sz="2000" kern="1200" dirty="0"/>
+        </a:p>
+      </dsp:txBody>
+      <dsp:txXfrm>
+        <a:off x="6023190" y="2106299"/>
+        <a:ext cx="2060143" cy="1206068"/>
+      </dsp:txXfrm>
+    </dsp:sp>
+  </dsp:spTree>
+</dsp:drawing>
+</file>
+
+<file path=ppt/diagrams/layout1.xml><?xml version="1.0" encoding="utf-8"?>
+<dgm:layoutDef xmlns:dgm="http://schemas.openxmlformats.org/drawingml/2006/diagram" xmlns:a="http://schemas.openxmlformats.org/drawingml/2006/main" uniqueId="urn:microsoft.com/office/officeart/2005/8/layout/process1">
+  <dgm:title val=""/>
+  <dgm:desc val=""/>
+  <dgm:catLst>
+    <dgm:cat type="process" pri="1000"/>
+    <dgm:cat type="convert" pri="15000"/>
+  </dgm:catLst>
+  <dgm:sampData useDef="1">
+    <dgm:dataModel>
+      <dgm:ptLst/>
+      <dgm:bg/>
+      <dgm:whole/>
+    </dgm:dataModel>
+  </dgm:sampData>
+  <dgm:styleData>
+    <dgm:dataModel>
+      <dgm:ptLst>
+        <dgm:pt modelId="0" type="doc"/>
+        <dgm:pt modelId="1"/>
+        <dgm:pt modelId="2"/>
+      </dgm:ptLst>
+      <dgm:cxnLst>
+        <dgm:cxn modelId="3" srcId="0" destId="1" srcOrd="0" destOrd="0"/>
+        <dgm:cxn modelId="4" srcId="0" destId="2" srcOrd="1" destOrd="0"/>
+      </dgm:cxnLst>
+      <dgm:bg/>
+      <dgm:whole/>
+    </dgm:dataModel>
+  </dgm:styleData>
+  <dgm:clrData>
+    <dgm:dataModel>
+      <dgm:ptLst>
+        <dgm:pt modelId="0" type="doc"/>
+        <dgm:pt modelId="1"/>
+        <dgm:pt modelId="2"/>
+        <dgm:pt modelId="3"/>
+        <dgm:pt modelId="4"/>
+      </dgm:ptLst>
+      <dgm:cxnLst>
+        <dgm:cxn modelId="5" srcId="0" destId="1" srcOrd="0" destOrd="0"/>
+        <dgm:cxn modelId="6" srcId="0" destId="2" srcOrd="1" destOrd="0"/>
+        <dgm:cxn modelId="7" srcId="0" destId="3" srcOrd="2" destOrd="0"/>
+        <dgm:cxn modelId="8" srcId="0" destId="4" srcOrd="3" destOrd="0"/>
+      </dgm:cxnLst>
+      <dgm:bg/>
+      <dgm:whole/>
+    </dgm:dataModel>
+  </dgm:clrData>
+  <dgm:layoutNode name="Name0">
+    <dgm:varLst>
+      <dgm:dir/>
+      <dgm:resizeHandles val="exact"/>
+    </dgm:varLst>
+    <dgm:choose name="Name1">
+      <dgm:if name="Name2" func="var" arg="dir" op="equ" val="norm">
+        <dgm:alg type="lin"/>
+      </dgm:if>
+      <dgm:else name="Name3">
+        <dgm:alg type="lin">
+          <dgm:param type="linDir" val="fromR"/>
+        </dgm:alg>
+      </dgm:else>
+    </dgm:choose>
+    <dgm:shape xmlns:r="http://schemas.openxmlformats.org/officeDocument/2006/relationships" r:blip="">
+      <dgm:adjLst/>
+    </dgm:shape>
+    <dgm:presOf/>
+    <dgm:constrLst>
+      <dgm:constr type="w" for="ch" ptType="node" refType="w"/>
+      <dgm:constr type="h" for="ch" ptType="node" op="equ"/>
+      <dgm:constr type="primFontSz" for="ch" ptType="node" op="equ" val="65"/>
+      <dgm:constr type="w" for="ch" ptType="sibTrans" refType="w" refFor="ch" refPtType="node" op="equ" fact="0.4"/>
+      <dgm:constr type="h" for="ch" ptType="sibTrans" op="equ"/>
+      <dgm:constr type="primFontSz" for="des" forName="connectorText" op="equ" val="55"/>
+      <dgm:constr type="primFontSz" for="des" forName="connectorText" refType="primFontSz" refFor="ch" refPtType="node" op="lte" fact="0.8"/>
+    </dgm:constrLst>
+    <dgm:ruleLst/>
+    <dgm:forEach name="nodesForEach" axis="ch" ptType="node">
+      <dgm:layoutNode name="node">
+        <dgm:varLst>
+          <dgm:bulletEnabled val="1"/>
+        </dgm:varLst>
+        <dgm:alg type="tx"/>
+        <dgm:shape xmlns:r="http://schemas.openxmlformats.org/officeDocument/2006/relationships" type="roundRect" r:blip="">
+          <dgm:adjLst>
+            <dgm:adj idx="1" val="0.1"/>
+          </dgm:adjLst>
+        </dgm:shape>
+        <dgm:presOf axis="desOrSelf" ptType="node"/>
+        <dgm:constrLst>
+          <dgm:constr type="h" refType="w" fact="0.6"/>
+          <dgm:constr type="tMarg" refType="primFontSz" fact="0.3"/>
+          <dgm:constr type="bMarg" refType="primFontSz" fact="0.3"/>
+          <dgm:constr type="lMarg" refType="primFontSz" fact="0.3"/>
+          <dgm:constr type="rMarg" refType="primFontSz" fact="0.3"/>
+        </dgm:constrLst>
+        <dgm:ruleLst>
+          <dgm:rule type="primFontSz" val="18" fact="NaN" max="NaN"/>
+          <dgm:rule type="h" val="NaN" fact="1.5" max="NaN"/>
+          <dgm:rule type="primFontSz" val="5" fact="NaN" max="NaN"/>
+          <dgm:rule type="h" val="INF" fact="NaN" max="NaN"/>
+        </dgm:ruleLst>
+      </dgm:layoutNode>
+      <dgm:forEach name="sibTransForEach" axis="followSib" ptType="sibTrans" cnt="1">
+        <dgm:layoutNode name="sibTrans">
+          <dgm:alg type="conn">
+            <dgm:param type="begPts" val="auto"/>
+            <dgm:param type="endPts" val="auto"/>
+          </dgm:alg>
+          <dgm:shape xmlns:r="http://schemas.openxmlformats.org/officeDocument/2006/relationships" type="conn" r:blip="">
+            <dgm:adjLst/>
+          </dgm:shape>
+          <dgm:presOf axis="self"/>
+          <dgm:constrLst>
+            <dgm:constr type="h" refType="w" fact="0.62"/>
+            <dgm:constr type="connDist"/>
+            <dgm:constr type="begPad" refType="connDist" fact="0.25"/>
+            <dgm:constr type="endPad" refType="connDist" fact="0.22"/>
+          </dgm:constrLst>
+          <dgm:ruleLst/>
+          <dgm:layoutNode name="connectorText">
+            <dgm:alg type="tx">
+              <dgm:param type="autoTxRot" val="grav"/>
+            </dgm:alg>
+            <dgm:shape xmlns:r="http://schemas.openxmlformats.org/officeDocument/2006/relationships" type="conn" r:blip="" hideGeom="1">
+              <dgm:adjLst/>
+            </dgm:shape>
+            <dgm:presOf axis="self"/>
+            <dgm:constrLst>
+              <dgm:constr type="lMarg"/>
+              <dgm:constr type="rMarg"/>
+              <dgm:constr type="tMarg"/>
+              <dgm:constr type="bMarg"/>
+            </dgm:constrLst>
+            <dgm:ruleLst>
+              <dgm:rule type="primFontSz" val="5" fact="NaN" max="NaN"/>
+            </dgm:ruleLst>
+          </dgm:layoutNode>
+        </dgm:layoutNode>
+      </dgm:forEach>
+    </dgm:forEach>
+  </dgm:layoutNode>
+</dgm:layoutDef>
+</file>
+
+<file path=ppt/diagrams/quickStyle1.xml><?xml version="1.0" encoding="utf-8"?>
+<dgm:styleDef xmlns:dgm="http://schemas.openxmlformats.org/drawingml/2006/diagram" xmlns:a="http://schemas.openxmlformats.org/drawingml/2006/main" uniqueId="urn:microsoft.com/office/officeart/2005/8/quickstyle/simple1">
+  <dgm:title val=""/>
+  <dgm:desc val=""/>
+  <dgm:catLst>
+    <dgm:cat type="simple" pri="10100"/>
+  </dgm:catLst>
+  <dgm:scene3d>
+    <a:camera prst="orthographicFront"/>
+    <a:lightRig rig="threePt" dir="t"/>
+  </dgm:scene3d>
+  <dgm:styleLbl name="node0">
+    <dgm:scene3d>
+      <a:camera prst="orthographicFront"/>
+      <a:lightRig rig="threePt" dir="t"/>
+    </dgm:scene3d>
+    <dgm:sp3d/>
+    <dgm:txPr/>
+    <dgm:style>
+      <a:lnRef idx="2">
+        <a:scrgbClr r="0" g="0" b="0"/>
+      </a:lnRef>
+      <a:fillRef idx="1">
+        <a:scrgbClr r="0" g="0" b="0"/>
+      </a:fillRef>
+      <a:effectRef idx="0">
+        <a:scrgbClr r="0" g="0" b="0"/>
+      </a:effectRef>
+      <a:fontRef idx="minor">
+        <a:schemeClr val="lt1"/>
+      </a:fontRef>
+    </dgm:style>
+  </dgm:styleLbl>
+  <dgm:styleLbl name="lnNode1">
+    <dgm:scene3d>
+      <a:camera prst="orthographicFront"/>
+      <a:lightRig rig="threePt" dir="t"/>
+    </dgm:scene3d>
+    <dgm:sp3d/>
+    <dgm:txPr/>
+    <dgm:style>
+      <a:lnRef idx="2">
+        <a:scrgbClr r="0" g="0" b="0"/>
+      </a:lnRef>
+      <a:fillRef idx="1">
+        <a:scrgbClr r="0" g="0" b="0"/>
+      </a:fillRef>
+      <a:effectRef idx="0">
+        <a:scrgbClr r="0" g="0" b="0"/>
+      </a:effectRef>
+      <a:fontRef idx="minor">
+        <a:schemeClr val="lt1"/>
+      </a:fontRef>
+    </dgm:style>
+  </dgm:styleLbl>
+  <dgm:styleLbl name="vennNode1">
+    <dgm:scene3d>
+      <a:camera prst="orthographicFront"/>
+      <a:lightRig rig="threePt" dir="t"/>
+    </dgm:scene3d>
+    <dgm:sp3d/>
+    <dgm:txPr/>
+    <dgm:style>
+      <a:lnRef idx="2">
+        <a:scrgbClr r="0" g="0" b="0"/>
+      </a:lnRef>
+      <a:fillRef idx="1">
+        <a:scrgbClr r="0" g="0" b="0"/>
+      </a:fillRef>
+      <a:effectRef idx="0">
+        <a:scrgbClr r="0" g="0" b="0"/>
+      </a:effectRef>
+      <a:fontRef idx="minor">
+        <a:schemeClr val="tx1"/>
+      </a:fontRef>
+    </dgm:style>
+  </dgm:styleLbl>
+  <dgm:styleLbl name="alignNode1">
+    <dgm:scene3d>
+      <a:camera prst="orthographicFront"/>
+      <a:lightRig rig="threePt" dir="t"/>
+    </dgm:scene3d>
+    <dgm:sp3d/>
+    <dgm:txPr/>
+    <dgm:style>
+      <a:lnRef idx="2">
+        <a:scrgbClr r="0" g="0" b="0"/>
+      </a:lnRef>
+      <a:fillRef idx="1">
+        <a:scrgbClr r="0" g="0" b="0"/>
+      </a:fillRef>
+      <a:effectRef idx="0">
+        <a:scrgbClr r="0" g="0" b="0"/>
+      </a:effectRef>
+      <a:fontRef idx="minor">
+        <a:schemeClr val="lt1"/>
+      </a:fontRef>
+    </dgm:style>
+  </dgm:styleLbl>
+  <dgm:styleLbl name="node1">
+    <dgm:scene3d>
+      <a:camera prst="orthographicFront"/>
+      <a:lightRig rig="threePt" dir="t"/>
+    </dgm:scene3d>
+    <dgm:sp3d/>
+    <dgm:txPr/>
+    <dgm:style>
+      <a:lnRef idx="2">
+        <a:scrgbClr r="0" g="0" b="0"/>
+      </a:lnRef>
+      <a:fillRef idx="1">
+        <a:scrgbClr r="0" g="0" b="0"/>
+      </a:fillRef>
+      <a:effectRef idx="0">
+        <a:scrgbClr r="0" g="0" b="0"/>
+      </a:effectRef>
+      <a:fontRef idx="minor">
+        <a:schemeClr val="lt1"/>
+      </a:fontRef>
+    </dgm:style>
+  </dgm:styleLbl>
+  <dgm:styleLbl name="node2">
+    <dgm:scene3d>
+      <a:camera prst="orthographicFront"/>
+      <a:lightRig rig="threePt" dir="t"/>
+    </dgm:scene3d>
+    <dgm:sp3d/>
+    <dgm:txPr/>
+    <dgm:style>
+      <a:lnRef idx="2">
+        <a:scrgbClr r="0" g="0" b="0"/>
+      </a:lnRef>
+      <a:fillRef idx="1">
+        <a:scrgbClr r="0" g="0" b="0"/>
+      </a:fillRef>
+      <a:effectRef idx="0">
+        <a:scrgbClr r="0" g="0" b="0"/>
+      </a:effectRef>
+      <a:fontRef idx="minor">
+        <a:schemeClr val="lt1"/>
+      </a:fontRef>
+    </dgm:style>
+  </dgm:styleLbl>
+  <dgm:styleLbl name="node3">
+    <dgm:scene3d>
+      <a:camera prst="orthographicFront"/>
+      <a:lightRig rig="threePt" dir="t"/>
+    </dgm:scene3d>
+    <dgm:sp3d/>
+    <dgm:txPr/>
+    <dgm:style>
+      <a:lnRef idx="2">
+        <a:scrgbClr r="0" g="0" b="0"/>
+      </a:lnRef>
+      <a:fillRef idx="1">
+        <a:scrgbClr r="0" g="0" b="0"/>
+      </a:fillRef>
+      <a:effectRef idx="0">
+        <a:scrgbClr r="0" g="0" b="0"/>
+      </a:effectRef>
+      <a:fontRef idx="minor">
+        <a:schemeClr val="lt1"/>
+      </a:fontRef>
+    </dgm:style>
+  </dgm:styleLbl>
+  <dgm:styleLbl name="node4">
+    <dgm:scene3d>
+      <a:camera prst="orthographicFront"/>
+      <a:lightRig rig="threePt" dir="t"/>
+    </dgm:scene3d>
+    <dgm:sp3d/>
+    <dgm:txPr/>
+    <dgm:style>
+      <a:lnRef idx="2">
+        <a:scrgbClr r="0" g="0" b="0"/>
+      </a:lnRef>
+      <a:fillRef idx="1">
+        <a:scrgbClr r="0" g="0" b="0"/>
+      </a:fillRef>
+      <a:effectRef idx="0">
+        <a:scrgbClr r="0" g="0" b="0"/>
+      </a:effectRef>
+      <a:fontRef idx="minor">
+        <a:schemeClr val="lt1"/>
+      </a:fontRef>
+    </dgm:style>
+  </dgm:styleLbl>
+  <dgm:styleLbl name="fgImgPlace1">
+    <dgm:scene3d>
+      <a:camera prst="orthographicFront"/>
+      <a:lightRig rig="threePt" dir="t"/>
+    </dgm:scene3d>
+    <dgm:sp3d/>
+    <dgm:txPr/>
+    <dgm:style>
+      <a:lnRef idx="2">
+        <a:scrgbClr r="0" g="0" b="0"/>
+      </a:lnRef>
+      <a:fillRef idx="1">
+        <a:scrgbClr r="0" g="0" b="0"/>
+      </a:fillRef>
+      <a:effectRef idx="0">
+        <a:scrgbClr r="0" g="0" b="0"/>
+      </a:effectRef>
+      <a:fontRef idx="minor"/>
+    </dgm:style>
+  </dgm:styleLbl>
+  <dgm:styleLbl name="alignImgPlace1">
+    <dgm:scene3d>
+      <a:camera prst="orthographicFront"/>
+      <a:lightRig rig="threePt" dir="t"/>
+    </dgm:scene3d>
+    <dgm:sp3d/>
+    <dgm:txPr/>
+    <dgm:style>
+      <a:lnRef idx="2">
+        <a:scrgbClr r="0" g="0" b="0"/>
+      </a:lnRef>
+      <a:fillRef idx="1">
+        <a:scrgbClr r="0" g="0" b="0"/>
+      </a:fillRef>
+      <a:effectRef idx="0">
+        <a:scrgbClr r="0" g="0" b="0"/>
+      </a:effectRef>
+      <a:fontRef idx="minor"/>
+    </dgm:style>
+  </dgm:styleLbl>
+  <dgm:styleLbl name="bgImgPlace1">
+    <dgm:scene3d>
+      <a:camera prst="orthographicFront"/>
+      <a:lightRig rig="threePt" dir="t"/>
+    </dgm:scene3d>
+    <dgm:sp3d/>
+    <dgm:txPr/>
+    <dgm:style>
+      <a:lnRef idx="2">
+        <a:scrgbClr r="0" g="0" b="0"/>
+      </a:lnRef>
+      <a:fillRef idx="1">
+        <a:scrgbClr r="0" g="0" b="0"/>
+      </a:fillRef>
+      <a:effectRef idx="0">
+        <a:scrgbClr r="0" g="0" b="0"/>
+      </a:effectRef>
+      <a:fontRef idx="minor"/>
+    </dgm:style>
+  </dgm:styleLbl>
+  <dgm:styleLbl name="sibTrans2D1">
+    <dgm:scene3d>
+      <a:camera prst="orthographicFront"/>
+      <a:lightRig rig="threePt" dir="t"/>
+    </dgm:scene3d>
+    <dgm:sp3d/>
+    <dgm:txPr/>
+    <dgm:style>
+      <a:lnRef idx="0">
+        <a:scrgbClr r="0" g="0" b="0"/>
+      </a:lnRef>
+      <a:fillRef idx="1">
+        <a:scrgbClr r="0" g="0" b="0"/>
+      </a:fillRef>
+      <a:effectRef idx="0">
+        <a:scrgbClr r="0" g="0" b="0"/>
+      </a:effectRef>
+      <a:fontRef idx="minor">
+        <a:schemeClr val="lt1"/>
+      </a:fontRef>
+    </dgm:style>
+  </dgm:styleLbl>
+  <dgm:styleLbl name="fgSibTrans2D1">
+    <dgm:scene3d>
+      <a:camera prst="orthographicFront"/>
+      <a:lightRig rig="threePt" dir="t"/>
+    </dgm:scene3d>
+    <dgm:sp3d/>
+    <dgm:txPr/>
+    <dgm:style>
+      <a:lnRef idx="0">
+        <a:scrgbClr r="0" g="0" b="0"/>
+      </a:lnRef>
+      <a:fillRef idx="1">
+        <a:scrgbClr r="0" g="0" b="0"/>
+      </a:fillRef>
+      <a:effectRef idx="0">
+        <a:scrgbClr r="0" g="0" b="0"/>
+      </a:effectRef>
+      <a:fontRef idx="minor">
+        <a:schemeClr val="lt1"/>
+      </a:fontRef>
+    </dgm:style>
+  </dgm:styleLbl>
+  <dgm:styleLbl name="bgSibTrans2D1">
+    <dgm:scene3d>
+      <a:camera prst="orthographicFront"/>
+      <a:lightRig rig="threePt" dir="t"/>
+    </dgm:scene3d>
+    <dgm:sp3d/>
+    <dgm:txPr/>
+    <dgm:style>
+      <a:lnRef idx="0">
+        <a:scrgbClr r="0" g="0" b="0"/>
+      </a:lnRef>
+      <a:fillRef idx="1">
+        <a:scrgbClr r="0" g="0" b="0"/>
+      </a:fillRef>
+      <a:effectRef idx="0">
+        <a:scrgbClr r="0" g="0" b="0"/>
+      </a:effectRef>
+      <a:fontRef idx="minor">
+        <a:schemeClr val="lt1"/>
+      </a:fontRef>
+    </dgm:style>
+  </dgm:styleLbl>
+  <dgm:styleLbl name="sibTrans1D1">
+    <dgm:scene3d>
+      <a:camera prst="orthographicFront"/>
+      <a:lightRig rig="threePt" dir="t"/>
+    </dgm:scene3d>
+    <dgm:sp3d/>
+    <dgm:txPr/>
+    <dgm:style>
+      <a:lnRef idx="1">
+        <a:scrgbClr r="0" g="0" b="0"/>
+      </a:lnRef>
+      <a:fillRef idx="0">
+        <a:scrgbClr r="0" g="0" b="0"/>
+      </a:fillRef>
+      <a:effectRef idx="0">
+        <a:scrgbClr r="0" g="0" b="0"/>
+      </a:effectRef>
+      <a:fontRef idx="minor"/>
+    </dgm:style>
+  </dgm:styleLbl>
+  <dgm:styleLbl name="callout">
+    <dgm:scene3d>
+      <a:camera prst="orthographicFront"/>
+      <a:lightRig rig="threePt" dir="t"/>
+    </dgm:scene3d>
+    <dgm:sp3d/>
+    <dgm:txPr/>
+    <dgm:style>
+      <a:lnRef idx="2">
+        <a:scrgbClr r="0" g="0" b="0"/>
+      </a:lnRef>
+      <a:fillRef idx="1">
+        <a:scrgbClr r="0" g="0" b="0"/>
+      </a:fillRef>
+      <a:effectRef idx="0">
+        <a:scrgbClr r="0" g="0" b="0"/>
+      </a:effectRef>
+      <a:fontRef idx="minor"/>
+    </dgm:style>
+  </dgm:styleLbl>
+  <dgm:styleLbl name="asst0">
+    <dgm:scene3d>
+      <a:camera prst="orthographicFront"/>
+      <a:lightRig rig="threePt" dir="t"/>
+    </dgm:scene3d>
+    <dgm:sp3d/>
+    <dgm:txPr/>
+    <dgm:style>
+      <a:lnRef idx="2">
+        <a:scrgbClr r="0" g="0" b="0"/>
+      </a:lnRef>
+      <a:fillRef idx="1">
+        <a:scrgbClr r="0" g="0" b="0"/>
+      </a:fillRef>
+      <a:effectRef idx="0">
+        <a:scrgbClr r="0" g="0" b="0"/>
+      </a:effectRef>
+      <a:fontRef idx="minor">
+        <a:schemeClr val="lt1"/>
+      </a:fontRef>
+    </dgm:style>
+  </dgm:styleLbl>
+  <dgm:styleLbl name="asst1">
+    <dgm:scene3d>
+      <a:camera prst="orthographicFront"/>
+      <a:lightRig rig="threePt" dir="t"/>
+    </dgm:scene3d>
+    <dgm:sp3d/>
+    <dgm:txPr/>
+    <dgm:style>
+      <a:lnRef idx="2">
+        <a:scrgbClr r="0" g="0" b="0"/>
+      </a:lnRef>
+      <a:fillRef idx="1">
+        <a:scrgbClr r="0" g="0" b="0"/>
+      </a:fillRef>
+      <a:effectRef idx="0">
+        <a:scrgbClr r="0" g="0" b="0"/>
+      </a:effectRef>
+      <a:fontRef idx="minor">
+        <a:schemeClr val="lt1"/>
+      </a:fontRef>
+    </dgm:style>
+  </dgm:styleLbl>
+  <dgm:styleLbl name="asst2">
+    <dgm:scene3d>
+      <a:camera prst="orthographicFront"/>
+      <a:lightRig rig="threePt" dir="t"/>
+    </dgm:scene3d>
+    <dgm:sp3d/>
+    <dgm:txPr/>
+    <dgm:style>
+      <a:lnRef idx="2">
+        <a:scrgbClr r="0" g="0" b="0"/>
+      </a:lnRef>
+      <a:fillRef idx="1">
+        <a:scrgbClr r="0" g="0" b="0"/>
+      </a:fillRef>
+      <a:effectRef idx="0">
+        <a:scrgbClr r="0" g="0" b="0"/>
+      </a:effectRef>
+      <a:fontRef idx="minor">
+        <a:schemeClr val="lt1"/>
+      </a:fontRef>
+    </dgm:style>
+  </dgm:styleLbl>
+  <dgm:styleLbl name="asst3">
+    <dgm:scene3d>
+      <a:camera prst="orthographicFront"/>
+      <a:lightRig rig="threePt" dir="t"/>
+    </dgm:scene3d>
+    <dgm:sp3d/>
+    <dgm:txPr/>
+    <dgm:style>
+      <a:lnRef idx="2">
+        <a:scrgbClr r="0" g="0" b="0"/>
+      </a:lnRef>
+      <a:fillRef idx="1">
+        <a:scrgbClr r="0" g="0" b="0"/>
+      </a:fillRef>
+      <a:effectRef idx="0">
+        <a:scrgbClr r="0" g="0" b="0"/>
+      </a:effectRef>
+      <a:fontRef idx="minor">
+        <a:schemeClr val="lt1"/>
+      </a:fontRef>
+    </dgm:style>
+  </dgm:styleLbl>
+  <dgm:styleLbl name="asst4">
+    <dgm:scene3d>
+      <a:camera prst="orthographicFront"/>
+      <a:lightRig rig="threePt" dir="t"/>
+    </dgm:scene3d>
+    <dgm:sp3d/>
+    <dgm:txPr/>
+    <dgm:style>
+      <a:lnRef idx="2">
+        <a:scrgbClr r="0" g="0" b="0"/>
+      </a:lnRef>
+      <a:fillRef idx="1">
+        <a:scrgbClr r="0" g="0" b="0"/>
+      </a:fillRef>
+      <a:effectRef idx="0">
+        <a:scrgbClr r="0" g="0" b="0"/>
+      </a:effectRef>
+      <a:fontRef idx="minor">
+        <a:schemeClr val="lt1"/>
+      </a:fontRef>
+    </dgm:style>
+  </dgm:styleLbl>
+  <dgm:styleLbl name="parChTrans2D1">
+    <dgm:scene3d>
+      <a:camera prst="orthographicFront"/>
+      <a:lightRig rig="threePt" dir="t"/>
+    </dgm:scene3d>
+    <dgm:sp3d/>
+    <dgm:txPr/>
+    <dgm:style>
+      <a:lnRef idx="2">
+        <a:scrgbClr r="0" g="0" b="0"/>
+      </a:lnRef>
+      <a:fillRef idx="1">
+        <a:scrgbClr r="0" g="0" b="0"/>
+      </a:fillRef>
+      <a:effectRef idx="0">
+        <a:scrgbClr r="0" g="0" b="0"/>
+      </a:effectRef>
+      <a:fontRef idx="minor">
+        <a:schemeClr val="lt1"/>
+      </a:fontRef>
+    </dgm:style>
+  </dgm:styleLbl>
+  <dgm:styleLbl name="parChTrans2D2">
+    <dgm:scene3d>
+      <a:camera prst="orthographicFront"/>
+      <a:lightRig rig="threePt" dir="t"/>
+    </dgm:scene3d>
+    <dgm:sp3d/>
+    <dgm:txPr/>
+    <dgm:style>
+      <a:lnRef idx="2">
+        <a:scrgbClr r="0" g="0" b="0"/>
+      </a:lnRef>
+      <a:fillRef idx="1">
+        <a:scrgbClr r="0" g="0" b="0"/>
+      </a:fillRef>
+      <a:effectRef idx="0">
+        <a:scrgbClr r="0" g="0" b="0"/>
+      </a:effectRef>
+      <a:fontRef idx="minor">
+        <a:schemeClr val="lt1"/>
+      </a:fontRef>
+    </dgm:style>
+  </dgm:styleLbl>
+  <dgm:styleLbl name="parChTrans2D3">
+    <dgm:scene3d>
+      <a:camera prst="orthographicFront"/>
+      <a:lightRig rig="threePt" dir="t"/>
+    </dgm:scene3d>
+    <dgm:sp3d/>
+    <dgm:txPr/>
+    <dgm:style>
+      <a:lnRef idx="2">
+        <a:scrgbClr r="0" g="0" b="0"/>
+      </a:lnRef>
+      <a:fillRef idx="1">
+        <a:scrgbClr r="0" g="0" b="0"/>
+      </a:fillRef>
+      <a:effectRef idx="0">
+        <a:scrgbClr r="0" g="0" b="0"/>
+      </a:effectRef>
+      <a:fontRef idx="minor">
+        <a:schemeClr val="lt1"/>
+      </a:fontRef>
+    </dgm:style>
+  </dgm:styleLbl>
+  <dgm:styleLbl name="parChTrans2D4">
+    <dgm:scene3d>
+      <a:camera prst="orthographicFront"/>
+      <a:lightRig rig="threePt" dir="t"/>
+    </dgm:scene3d>
+    <dgm:sp3d/>
+    <dgm:txPr/>
+    <dgm:style>
+      <a:lnRef idx="2">
+        <a:scrgbClr r="0" g="0" b="0"/>
+      </a:lnRef>
+      <a:fillRef idx="1">
+        <a:scrgbClr r="0" g="0" b="0"/>
+      </a:fillRef>
+      <a:effectRef idx="0">
+        <a:scrgbClr r="0" g="0" b="0"/>
+      </a:effectRef>
+      <a:fontRef idx="minor">
+        <a:schemeClr val="lt1"/>
+      </a:fontRef>
+    </dgm:style>
+  </dgm:styleLbl>
+  <dgm:styleLbl name="parChTrans1D1">
+    <dgm:scene3d>
+      <a:camera prst="orthographicFront"/>
+      <a:lightRig rig="threePt" dir="t"/>
+    </dgm:scene3d>
+    <dgm:sp3d/>
+    <dgm:txPr/>
+    <dgm:style>
+      <a:lnRef idx="2">
+        <a:scrgbClr r="0" g="0" b="0"/>
+      </a:lnRef>
+      <a:fillRef idx="0">
+        <a:scrgbClr r="0" g="0" b="0"/>
+      </a:fillRef>
+      <a:effectRef idx="0">
+        <a:scrgbClr r="0" g="0" b="0"/>
+      </a:effectRef>
+      <a:fontRef idx="minor"/>
+    </dgm:style>
+  </dgm:styleLbl>
+  <dgm:styleLbl name="parChTrans1D2">
+    <dgm:scene3d>
+      <a:camera prst="orthographicFront"/>
+      <a:lightRig rig="threePt" dir="t"/>
+    </dgm:scene3d>
+    <dgm:sp3d/>
+    <dgm:txPr/>
+    <dgm:style>
+      <a:lnRef idx="2">
+        <a:scrgbClr r="0" g="0" b="0"/>
+      </a:lnRef>
+      <a:fillRef idx="0">
+        <a:scrgbClr r="0" g="0" b="0"/>
+      </a:fillRef>
+      <a:effectRef idx="0">
+        <a:scrgbClr r="0" g="0" b="0"/>
+      </a:effectRef>
+      <a:fontRef idx="minor"/>
+    </dgm:style>
+  </dgm:styleLbl>
+  <dgm:styleLbl name="parChTrans1D3">
+    <dgm:scene3d>
+      <a:camera prst="orthographicFront"/>
+      <a:lightRig rig="threePt" dir="t"/>
+    </dgm:scene3d>
+    <dgm:sp3d/>
+    <dgm:txPr/>
+    <dgm:style>
+      <a:lnRef idx="2">
+        <a:scrgbClr r="0" g="0" b="0"/>
+      </a:lnRef>
+      <a:fillRef idx="0">
+        <a:scrgbClr r="0" g="0" b="0"/>
+      </a:fillRef>
+      <a:effectRef idx="0">
+        <a:scrgbClr r="0" g="0" b="0"/>
+      </a:effectRef>
+      <a:fontRef idx="minor"/>
+    </dgm:style>
+  </dgm:styleLbl>
+  <dgm:styleLbl name="parChTrans1D4">
+    <dgm:scene3d>
+      <a:camera prst="orthographicFront"/>
+      <a:lightRig rig="threePt" dir="t"/>
+    </dgm:scene3d>
+    <dgm:sp3d/>
+    <dgm:txPr/>
+    <dgm:style>
+      <a:lnRef idx="2">
+        <a:scrgbClr r="0" g="0" b="0"/>
+      </a:lnRef>
+      <a:fillRef idx="0">
+        <a:scrgbClr r="0" g="0" b="0"/>
+      </a:fillRef>
+      <a:effectRef idx="0">
+        <a:scrgbClr r="0" g="0" b="0"/>
+      </a:effectRef>
+      <a:fontRef idx="minor"/>
+    </dgm:style>
+  </dgm:styleLbl>
+  <dgm:styleLbl name="fgAcc1">
+    <dgm:scene3d>
+      <a:camera prst="orthographicFront"/>
+      <a:lightRig rig="threePt" dir="t"/>
+    </dgm:scene3d>
+    <dgm:sp3d/>
+    <dgm:txPr/>
+    <dgm:style>
+      <a:lnRef idx="2">
+        <a:scrgbClr r="0" g="0" b="0"/>
+      </a:lnRef>
+      <a:fillRef idx="1">
+        <a:scrgbClr r="0" g="0" b="0"/>
+      </a:fillRef>
+      <a:effectRef idx="0">
+        <a:scrgbClr r="0" g="0" b="0"/>
+      </a:effectRef>
+      <a:fontRef idx="minor"/>
+    </dgm:style>
+  </dgm:styleLbl>
+  <dgm:styleLbl name="conFgAcc1">
+    <dgm:scene3d>
+      <a:camera prst="orthographicFront"/>
+      <a:lightRig rig="threePt" dir="t"/>
+    </dgm:scene3d>
+    <dgm:sp3d/>
+    <dgm:txPr/>
+    <dgm:style>
+      <a:lnRef idx="2">
+        <a:scrgbClr r="0" g="0" b="0"/>
+      </a:lnRef>
+      <a:fillRef idx="1">
+        <a:scrgbClr r="0" g="0" b="0"/>
+      </a:fillRef>
+      <a:effectRef idx="0">
+        <a:scrgbClr r="0" g="0" b="0"/>
+      </a:effectRef>
+      <a:fontRef idx="minor"/>
+    </dgm:style>
+  </dgm:styleLbl>
+  <dgm:styleLbl name="alignAcc1">
+    <dgm:scene3d>
+      <a:camera prst="orthographicFront"/>
+      <a:lightRig rig="threePt" dir="t"/>
+    </dgm:scene3d>
+    <dgm:sp3d/>
+    <dgm:txPr/>
+    <dgm:style>
+      <a:lnRef idx="2">
+        <a:scrgbClr r="0" g="0" b="0"/>
+      </a:lnRef>
+      <a:fillRef idx="1">
+        <a:scrgbClr r="0" g="0" b="0"/>
+      </a:fillRef>
+      <a:effectRef idx="0">
+        <a:scrgbClr r="0" g="0" b="0"/>
+      </a:effectRef>
+      <a:fontRef idx="minor"/>
+    </dgm:style>
+  </dgm:styleLbl>
+  <dgm:styleLbl name="trAlignAcc1">
+    <dgm:scene3d>
+      <a:camera prst="orthographicFront"/>
+      <a:lightRig rig="threePt" dir="t"/>
+    </dgm:scene3d>
+    <dgm:sp3d/>
+    <dgm:txPr/>
+    <dgm:style>
+      <a:lnRef idx="1">
+        <a:scrgbClr r="0" g="0" b="0"/>
+      </a:lnRef>
+      <a:fillRef idx="1">
+        <a:scrgbClr r="0" g="0" b="0"/>
+      </a:fillRef>
+      <a:effectRef idx="0">
+        <a:scrgbClr r="0" g="0" b="0"/>
+      </a:effectRef>
+      <a:fontRef idx="minor"/>
+    </dgm:style>
+  </dgm:styleLbl>
+  <dgm:styleLbl name="bgAcc1">
+    <dgm:scene3d>
+      <a:camera prst="orthographicFront"/>
+      <a:lightRig rig="threePt" dir="t"/>
+    </dgm:scene3d>
+    <dgm:sp3d/>
+    <dgm:txPr/>
+    <dgm:style>
+      <a:lnRef idx="2">
+        <a:scrgbClr r="0" g="0" b="0"/>
+      </a:lnRef>
+      <a:fillRef idx="1">
+        <a:scrgbClr r="0" g="0" b="0"/>
+      </a:fillRef>
+      <a:effectRef idx="0">
+        <a:scrgbClr r="0" g="0" b="0"/>
+      </a:effectRef>
+      <a:fontRef idx="minor"/>
+    </dgm:style>
+  </dgm:styleLbl>
+  <dgm:styleLbl name="solidFgAcc1">
+    <dgm:scene3d>
+      <a:camera prst="orthographicFront"/>
+      <a:lightRig rig="threePt" dir="t"/>
+    </dgm:scene3d>
+    <dgm:sp3d/>
+    <dgm:txPr/>
+    <dgm:style>
+      <a:lnRef idx="2">
+        <a:scrgbClr r="0" g="0" b="0"/>
+      </a:lnRef>
+      <a:fillRef idx="1">
+        <a:scrgbClr r="0" g="0" b="0"/>
+      </a:fillRef>
+      <a:effectRef idx="0">
+        <a:scrgbClr r="0" g="0" b="0"/>
+      </a:effectRef>
+      <a:fontRef idx="minor"/>
+    </dgm:style>
+  </dgm:styleLbl>
+  <dgm:styleLbl name="solidAlignAcc1">
+    <dgm:scene3d>
+      <a:camera prst="orthographicFront"/>
+      <a:lightRig rig="threePt" dir="t"/>
+    </dgm:scene3d>
+    <dgm:sp3d/>
+    <dgm:txPr/>
+    <dgm:style>
+      <a:lnRef idx="2">
+        <a:scrgbClr r="0" g="0" b="0"/>
+      </a:lnRef>
+      <a:fillRef idx="1">
+        <a:scrgbClr r="0" g="0" b="0"/>
+      </a:fillRef>
+      <a:effectRef idx="0">
+        <a:scrgbClr r="0" g="0" b="0"/>
+      </a:effectRef>
+      <a:fontRef idx="minor"/>
+    </dgm:style>
+  </dgm:styleLbl>
+  <dgm:styleLbl name="solidBgAcc1">
+    <dgm:scene3d>
+      <a:camera prst="orthographicFront"/>
+      <a:lightRig rig="threePt" dir="t"/>
+    </dgm:scene3d>
+    <dgm:sp3d/>
+    <dgm:txPr/>
+    <dgm:style>
+      <a:lnRef idx="2">
+        <a:scrgbClr r="0" g="0" b="0"/>
+      </a:lnRef>
+      <a:fillRef idx="1">
+        <a:scrgbClr r="0" g="0" b="0"/>
+      </a:fillRef>
+      <a:effectRef idx="0">
+        <a:scrgbClr r="0" g="0" b="0"/>
+      </a:effectRef>
+      <a:fontRef idx="minor"/>
+    </dgm:style>
+  </dgm:styleLbl>
+  <dgm:styleLbl name="fgAccFollowNode1">
+    <dgm:scene3d>
+      <a:camera prst="orthographicFront"/>
+      <a:lightRig rig="threePt" dir="t"/>
+    </dgm:scene3d>
+    <dgm:sp3d/>
+    <dgm:txPr/>
+    <dgm:style>
+      <a:lnRef idx="2">
+        <a:scrgbClr r="0" g="0" b="0"/>
+      </a:lnRef>
+      <a:fillRef idx="1">
+        <a:scrgbClr r="0" g="0" b="0"/>
+      </a:fillRef>
+      <a:effectRef idx="0">
+        <a:scrgbClr r="0" g="0" b="0"/>
+      </a:effectRef>
+      <a:fontRef idx="minor"/>
+    </dgm:style>
+  </dgm:styleLbl>
+  <dgm:styleLbl name="alignAccFollowNode1">
+    <dgm:scene3d>
+      <a:camera prst="orthographicFront"/>
+      <a:lightRig rig="threePt" dir="t"/>
+    </dgm:scene3d>
+    <dgm:sp3d/>
+    <dgm:txPr/>
+    <dgm:style>
+      <a:lnRef idx="2">
+        <a:scrgbClr r="0" g="0" b="0"/>
+      </a:lnRef>
+      <a:fillRef idx="1">
+        <a:scrgbClr r="0" g="0" b="0"/>
+      </a:fillRef>
+      <a:effectRef idx="0">
+        <a:scrgbClr r="0" g="0" b="0"/>
+      </a:effectRef>
+      <a:fontRef idx="minor"/>
+    </dgm:style>
+  </dgm:styleLbl>
+  <dgm:styleLbl name="bgAccFollowNode1">
+    <dgm:scene3d>
+      <a:camera prst="orthographicFront"/>
+      <a:lightRig rig="threePt" dir="t"/>
+    </dgm:scene3d>
+    <dgm:sp3d/>
+    <dgm:txPr/>
+    <dgm:style>
+      <a:lnRef idx="2">
+        <a:scrgbClr r="0" g="0" b="0"/>
+      </a:lnRef>
+      <a:fillRef idx="1">
+        <a:scrgbClr r="0" g="0" b="0"/>
+      </a:fillRef>
+      <a:effectRef idx="0">
+        <a:scrgbClr r="0" g="0" b="0"/>
+      </a:effectRef>
+      <a:fontRef idx="minor"/>
+    </dgm:style>
+  </dgm:styleLbl>
+  <dgm:styleLbl name="fgAcc0">
+    <dgm:scene3d>
+      <a:camera prst="orthographicFront"/>
+      <a:lightRig rig="threePt" dir="t"/>
+    </dgm:scene3d>
+    <dgm:sp3d/>
+    <dgm:txPr/>
+    <dgm:style>
+      <a:lnRef idx="2">
+        <a:scrgbClr r="0" g="0" b="0"/>
+      </a:lnRef>
+      <a:fillRef idx="1">
+        <a:scrgbClr r="0" g="0" b="0"/>
+      </a:fillRef>
+      <a:effectRef idx="0">
+        <a:scrgbClr r="0" g="0" b="0"/>
+      </a:effectRef>
+      <a:fontRef idx="minor"/>
+    </dgm:style>
+  </dgm:styleLbl>
+  <dgm:styleLbl name="fgAcc2">
+    <dgm:scene3d>
+      <a:camera prst="orthographicFront"/>
+      <a:lightRig rig="threePt" dir="t"/>
+    </dgm:scene3d>
+    <dgm:sp3d/>
+    <dgm:txPr/>
+    <dgm:style>
+      <a:lnRef idx="2">
+        <a:scrgbClr r="0" g="0" b="0"/>
+      </a:lnRef>
+      <a:fillRef idx="1">
+        <a:scrgbClr r="0" g="0" b="0"/>
+      </a:fillRef>
+      <a:effectRef idx="0">
+        <a:scrgbClr r="0" g="0" b="0"/>
+      </a:effectRef>
+      <a:fontRef idx="minor"/>
+    </dgm:style>
+  </dgm:styleLbl>
+  <dgm:styleLbl name="fgAcc3">
+    <dgm:scene3d>
+      <a:camera prst="orthographicFront"/>
+      <a:lightRig rig="threePt" dir="t"/>
+    </dgm:scene3d>
+    <dgm:sp3d/>
+    <dgm:txPr/>
+    <dgm:style>
+      <a:lnRef idx="2">
+        <a:scrgbClr r="0" g="0" b="0"/>
+      </a:lnRef>
+      <a:fillRef idx="1">
+        <a:scrgbClr r="0" g="0" b="0"/>
+      </a:fillRef>
+      <a:effectRef idx="0">
+        <a:scrgbClr r="0" g="0" b="0"/>
+      </a:effectRef>
+      <a:fontRef idx="minor"/>
+    </dgm:style>
+  </dgm:styleLbl>
+  <dgm:styleLbl name="fgAcc4">
+    <dgm:scene3d>
+      <a:camera prst="orthographicFront"/>
+      <a:lightRig rig="threePt" dir="t"/>
+    </dgm:scene3d>
+    <dgm:sp3d/>
+    <dgm:txPr/>
+    <dgm:style>
+      <a:lnRef idx="2">
+        <a:scrgbClr r="0" g="0" b="0"/>
+      </a:lnRef>
+      <a:fillRef idx="1">
+        <a:scrgbClr r="0" g="0" b="0"/>
+      </a:fillRef>
+      <a:effectRef idx="0">
+        <a:scrgbClr r="0" g="0" b="0"/>
+      </a:effectRef>
+      <a:fontRef idx="minor"/>
+    </dgm:style>
+  </dgm:styleLbl>
+  <dgm:styleLbl name="bgShp">
+    <dgm:scene3d>
+      <a:camera prst="orthographicFront"/>
+      <a:lightRig rig="threePt" dir="t"/>
+    </dgm:scene3d>
+    <dgm:sp3d/>
+    <dgm:txPr/>
+    <dgm:style>
+      <a:lnRef idx="0">
+        <a:scrgbClr r="0" g="0" b="0"/>
+      </a:lnRef>
+      <a:fillRef idx="1">
+        <a:scrgbClr r="0" g="0" b="0"/>
+      </a:fillRef>
+      <a:effectRef idx="0">
+        <a:scrgbClr r="0" g="0" b="0"/>
+      </a:effectRef>
+      <a:fontRef idx="minor"/>
+    </dgm:style>
+  </dgm:styleLbl>
+  <dgm:styleLbl name="dkBgShp">
+    <dgm:scene3d>
+      <a:camera prst="orthographicFront"/>
+      <a:lightRig rig="threePt" dir="t"/>
+    </dgm:scene3d>
+    <dgm:sp3d/>
+    <dgm:txPr/>
+    <dgm:style>
+      <a:lnRef idx="0">
+        <a:scrgbClr r="0" g="0" b="0"/>
+      </a:lnRef>
+      <a:fillRef idx="1">
+        <a:scrgbClr r="0" g="0" b="0"/>
+      </a:fillRef>
+      <a:effectRef idx="0">
+        <a:scrgbClr r="0" g="0" b="0"/>
+      </a:effectRef>
+      <a:fontRef idx="minor"/>
+    </dgm:style>
+  </dgm:styleLbl>
+  <dgm:styleLbl name="trBgShp">
+    <dgm:scene3d>
+      <a:camera prst="orthographicFront"/>
+      <a:lightRig rig="threePt" dir="t"/>
+    </dgm:scene3d>
+    <dgm:sp3d/>
+    <dgm:txPr/>
+    <dgm:style>
+      <a:lnRef idx="0">
+        <a:scrgbClr r="0" g="0" b="0"/>
+      </a:lnRef>
+      <a:fillRef idx="1">
+        <a:scrgbClr r="0" g="0" b="0"/>
+      </a:fillRef>
+      <a:effectRef idx="0">
+        <a:scrgbClr r="0" g="0" b="0"/>
+      </a:effectRef>
+      <a:fontRef idx="minor"/>
+    </dgm:style>
+  </dgm:styleLbl>
+  <dgm:styleLbl name="fgShp">
+    <dgm:scene3d>
+      <a:camera prst="orthographicFront"/>
+      <a:lightRig rig="threePt" dir="t"/>
+    </dgm:scene3d>
+    <dgm:sp3d/>
+    <dgm:txPr/>
+    <dgm:style>
+      <a:lnRef idx="2">
+        <a:scrgbClr r="0" g="0" b="0"/>
+      </a:lnRef>
+      <a:fillRef idx="1">
+        <a:scrgbClr r="0" g="0" b="0"/>
+      </a:fillRef>
+      <a:effectRef idx="0">
+        <a:scrgbClr r="0" g="0" b="0"/>
+      </a:effectRef>
+      <a:fontRef idx="minor"/>
+    </dgm:style>
+  </dgm:styleLbl>
+  <dgm:styleLbl name="revTx">
+    <dgm:scene3d>
+      <a:camera prst="orthographicFront"/>
+      <a:lightRig rig="threePt" dir="t"/>
+    </dgm:scene3d>
+    <dgm:sp3d/>
+    <dgm:txPr/>
+    <dgm:style>
+      <a:lnRef idx="0">
+        <a:scrgbClr r="0" g="0" b="0"/>
+      </a:lnRef>
+      <a:fillRef idx="0">
+        <a:scrgbClr r="0" g="0" b="0"/>
+      </a:fillRef>
+      <a:effectRef idx="0">
+        <a:scrgbClr r="0" g="0" b="0"/>
+      </a:effectRef>
+      <a:fontRef idx="minor"/>
+    </dgm:style>
+  </dgm:styleLbl>
+</dgm:styleDef>
+</file>
+
 <file path=ppt/notesMasters/notesMaster1.xml><?xml version="1.0" encoding="utf-8"?>
-<p:notesMaster xmlns:a="http://schemas.openxmlformats.org/drawingml/2006/main" xmlns:p="http://schemas.openxmlformats.org/presentationml/2006/main" xmlns:r="http://schemas.openxmlformats.org/officeDocument/2006/relationships">
+<p:notesMaster xmlns:a="http://schemas.openxmlformats.org/drawingml/2006/main" xmlns:r="http://schemas.openxmlformats.org/officeDocument/2006/relationships" xmlns:p="http://schemas.openxmlformats.org/presentationml/2006/main">
   <p:cSld>
     <p:bg>
       <p:bgRef idx="1001">
@@ -263,7 +2865,7 @@
         <p:spPr>
           <a:xfrm>
             <a:off x="0" y="0"/>
-            <a:ext cx="2971800" cy="457200"/>
+            <a:ext cx="2971800" cy="458788"/>
           </a:xfrm>
           <a:prstGeom prst="rect">
             <a:avLst/>
@@ -277,7 +2879,7 @@
             </a:lvl1pPr>
           </a:lstStyle>
           <a:p>
-            <a:endParaRPr lang="en-US"/>
+            <a:endParaRPr lang="da-DK"/>
           </a:p>
         </p:txBody>
       </p:sp>
@@ -294,7 +2896,7 @@
         <p:spPr>
           <a:xfrm>
             <a:off x="3884613" y="0"/>
-            <a:ext cx="2971800" cy="457200"/>
+            <a:ext cx="2971800" cy="458788"/>
           </a:xfrm>
           <a:prstGeom prst="rect">
             <a:avLst/>
@@ -308,11 +2910,11 @@
             </a:lvl1pPr>
           </a:lstStyle>
           <a:p>
-            <a:fld id="{0F89C1C7-3DCD-1040-A9CF-14679D8B5DDD}" type="datetimeFigureOut">
-              <a:rPr lang="en-US" smtClean="0"/>
-              <a:t>10/17/16</a:t>
+            <a:fld id="{F05A8E7A-C2AA-41F3-8C21-415D9D59E93D}" type="datetimeFigureOut">
+              <a:rPr lang="da-DK" smtClean="0"/>
+              <a:t>30-08-2026</a:t>
             </a:fld>
-            <a:endParaRPr lang="en-US"/>
+            <a:endParaRPr lang="da-DK"/>
           </a:p>
         </p:txBody>
       </p:sp>
@@ -328,8 +2930,8 @@
         </p:nvSpPr>
         <p:spPr>
           <a:xfrm>
-            <a:off x="1143000" y="685800"/>
-            <a:ext cx="4572000" cy="3429000"/>
+            <a:off x="685800" y="1143000"/>
+            <a:ext cx="5486400" cy="3086100"/>
           </a:xfrm>
           <a:prstGeom prst="rect">
             <a:avLst/>
@@ -345,7 +2947,7 @@
           <a:bodyPr vert="horz" lIns="91440" tIns="45720" rIns="91440" bIns="45720" rtlCol="0" anchor="ctr"/>
           <a:lstStyle/>
           <a:p>
-            <a:endParaRPr lang="en-US"/>
+            <a:endParaRPr lang="da-DK"/>
           </a:p>
         </p:txBody>
       </p:sp>
@@ -361,8 +2963,8 @@
         </p:nvSpPr>
         <p:spPr>
           <a:xfrm>
-            <a:off x="685800" y="4343400"/>
-            <a:ext cx="5486400" cy="4114800"/>
+            <a:off x="685800" y="4400550"/>
+            <a:ext cx="5486400" cy="3600450"/>
           </a:xfrm>
           <a:prstGeom prst="rect">
             <a:avLst/>
@@ -374,38 +2976,38 @@
           <a:p>
             <a:pPr lvl="0"/>
             <a:r>
-              <a:rPr lang="en-US" smtClean="0"/>
+              <a:rPr lang="en-US"/>
               <a:t>Click to edit Master text styles</a:t>
             </a:r>
           </a:p>
           <a:p>
             <a:pPr lvl="1"/>
             <a:r>
-              <a:rPr lang="en-US" smtClean="0"/>
+              <a:rPr lang="en-US"/>
               <a:t>Second level</a:t>
             </a:r>
           </a:p>
           <a:p>
             <a:pPr lvl="2"/>
             <a:r>
-              <a:rPr lang="en-US" smtClean="0"/>
+              <a:rPr lang="en-US"/>
               <a:t>Third level</a:t>
             </a:r>
           </a:p>
           <a:p>
             <a:pPr lvl="3"/>
             <a:r>
-              <a:rPr lang="en-US" smtClean="0"/>
+              <a:rPr lang="en-US"/>
               <a:t>Fourth level</a:t>
             </a:r>
           </a:p>
           <a:p>
             <a:pPr lvl="4"/>
             <a:r>
-              <a:rPr lang="en-US" smtClean="0"/>
+              <a:rPr lang="en-US"/>
               <a:t>Fifth level</a:t>
             </a:r>
-            <a:endParaRPr lang="en-US"/>
+            <a:endParaRPr lang="da-DK"/>
           </a:p>
         </p:txBody>
       </p:sp>
@@ -422,7 +3024,7 @@
         <p:spPr>
           <a:xfrm>
             <a:off x="0" y="8685213"/>
-            <a:ext cx="2971800" cy="457200"/>
+            <a:ext cx="2971800" cy="458787"/>
           </a:xfrm>
           <a:prstGeom prst="rect">
             <a:avLst/>
@@ -436,7 +3038,7 @@
             </a:lvl1pPr>
           </a:lstStyle>
           <a:p>
-            <a:endParaRPr lang="en-US"/>
+            <a:endParaRPr lang="da-DK"/>
           </a:p>
         </p:txBody>
       </p:sp>
@@ -453,7 +3055,7 @@
         <p:spPr>
           <a:xfrm>
             <a:off x="3884613" y="8685213"/>
-            <a:ext cx="2971800" cy="457200"/>
+            <a:ext cx="2971800" cy="458787"/>
           </a:xfrm>
           <a:prstGeom prst="rect">
             <a:avLst/>
@@ -467,24 +3069,24 @@
             </a:lvl1pPr>
           </a:lstStyle>
           <a:p>
-            <a:fld id="{BB5E49A5-4136-284D-997B-48E1D791AD67}" type="slidenum">
-              <a:rPr lang="en-US" smtClean="0"/>
+            <a:fld id="{5EFB3EBE-AB4E-46D2-BC7D-ABF66B229765}" type="slidenum">
+              <a:rPr lang="da-DK" smtClean="0"/>
               <a:t>‹#›</a:t>
             </a:fld>
-            <a:endParaRPr lang="en-US"/>
+            <a:endParaRPr lang="da-DK"/>
           </a:p>
         </p:txBody>
       </p:sp>
     </p:spTree>
     <p:extLst>
       <p:ext uri="{BB962C8B-B14F-4D97-AF65-F5344CB8AC3E}">
-        <p14:creationId xmlns:p14="http://schemas.microsoft.com/office/powerpoint/2010/main" val="2623252185"/>
+        <p14:creationId xmlns:p14="http://schemas.microsoft.com/office/powerpoint/2010/main" val="1377123443"/>
       </p:ext>
     </p:extLst>
   </p:cSld>
   <p:clrMap bg1="lt1" tx1="dk1" bg2="lt2" tx2="dk2" accent1="accent1" accent2="accent2" accent3="accent3" accent4="accent4" accent5="accent5" accent6="accent6" hlink="hlink" folHlink="folHlink"/>
   <p:notesStyle>
-    <a:lvl1pPr marL="0" algn="l" defTabSz="457200" rtl="0" eaLnBrk="1" latinLnBrk="0" hangingPunct="1">
+    <a:lvl1pPr marL="0" algn="l" defTabSz="914400" rtl="0" eaLnBrk="1" latinLnBrk="0" hangingPunct="1">
       <a:defRPr sz="1200" kern="1200">
         <a:solidFill>
           <a:schemeClr val="tx1"/>
@@ -494,7 +3096,7 @@
         <a:cs typeface="+mn-cs"/>
       </a:defRPr>
     </a:lvl1pPr>
-    <a:lvl2pPr marL="457200" algn="l" defTabSz="457200" rtl="0" eaLnBrk="1" latinLnBrk="0" hangingPunct="1">
+    <a:lvl2pPr marL="457200" algn="l" defTabSz="914400" rtl="0" eaLnBrk="1" latinLnBrk="0" hangingPunct="1">
       <a:defRPr sz="1200" kern="1200">
         <a:solidFill>
           <a:schemeClr val="tx1"/>
@@ -504,7 +3106,7 @@
         <a:cs typeface="+mn-cs"/>
       </a:defRPr>
     </a:lvl2pPr>
-    <a:lvl3pPr marL="914400" algn="l" defTabSz="457200" rtl="0" eaLnBrk="1" latinLnBrk="0" hangingPunct="1">
+    <a:lvl3pPr marL="914400" algn="l" defTabSz="914400" rtl="0" eaLnBrk="1" latinLnBrk="0" hangingPunct="1">
       <a:defRPr sz="1200" kern="1200">
         <a:solidFill>
           <a:schemeClr val="tx1"/>
@@ -514,7 +3116,7 @@
         <a:cs typeface="+mn-cs"/>
       </a:defRPr>
     </a:lvl3pPr>
-    <a:lvl4pPr marL="1371600" algn="l" defTabSz="457200" rtl="0" eaLnBrk="1" latinLnBrk="0" hangingPunct="1">
+    <a:lvl4pPr marL="1371600" algn="l" defTabSz="914400" rtl="0" eaLnBrk="1" latinLnBrk="0" hangingPunct="1">
       <a:defRPr sz="1200" kern="1200">
         <a:solidFill>
           <a:schemeClr val="tx1"/>
@@ -524,7 +3126,7 @@
         <a:cs typeface="+mn-cs"/>
       </a:defRPr>
     </a:lvl4pPr>
-    <a:lvl5pPr marL="1828800" algn="l" defTabSz="457200" rtl="0" eaLnBrk="1" latinLnBrk="0" hangingPunct="1">
+    <a:lvl5pPr marL="1828800" algn="l" defTabSz="914400" rtl="0" eaLnBrk="1" latinLnBrk="0" hangingPunct="1">
       <a:defRPr sz="1200" kern="1200">
         <a:solidFill>
           <a:schemeClr val="tx1"/>
@@ -534,7 +3136,7 @@
         <a:cs typeface="+mn-cs"/>
       </a:defRPr>
     </a:lvl5pPr>
-    <a:lvl6pPr marL="2286000" algn="l" defTabSz="457200" rtl="0" eaLnBrk="1" latinLnBrk="0" hangingPunct="1">
+    <a:lvl6pPr marL="2286000" algn="l" defTabSz="914400" rtl="0" eaLnBrk="1" latinLnBrk="0" hangingPunct="1">
       <a:defRPr sz="1200" kern="1200">
         <a:solidFill>
           <a:schemeClr val="tx1"/>
@@ -544,7 +3146,7 @@
         <a:cs typeface="+mn-cs"/>
       </a:defRPr>
     </a:lvl6pPr>
-    <a:lvl7pPr marL="2743200" algn="l" defTabSz="457200" rtl="0" eaLnBrk="1" latinLnBrk="0" hangingPunct="1">
+    <a:lvl7pPr marL="2743200" algn="l" defTabSz="914400" rtl="0" eaLnBrk="1" latinLnBrk="0" hangingPunct="1">
       <a:defRPr sz="1200" kern="1200">
         <a:solidFill>
           <a:schemeClr val="tx1"/>
@@ -554,7 +3156,7 @@
         <a:cs typeface="+mn-cs"/>
       </a:defRPr>
     </a:lvl7pPr>
-    <a:lvl8pPr marL="3200400" algn="l" defTabSz="457200" rtl="0" eaLnBrk="1" latinLnBrk="0" hangingPunct="1">
+    <a:lvl8pPr marL="3200400" algn="l" defTabSz="914400" rtl="0" eaLnBrk="1" latinLnBrk="0" hangingPunct="1">
       <a:defRPr sz="1200" kern="1200">
         <a:solidFill>
           <a:schemeClr val="tx1"/>
@@ -564,7 +3166,7 @@
         <a:cs typeface="+mn-cs"/>
       </a:defRPr>
     </a:lvl8pPr>
-    <a:lvl9pPr marL="3657600" algn="l" defTabSz="457200" rtl="0" eaLnBrk="1" latinLnBrk="0" hangingPunct="1">
+    <a:lvl9pPr marL="3657600" algn="l" defTabSz="914400" rtl="0" eaLnBrk="1" latinLnBrk="0" hangingPunct="1">
       <a:defRPr sz="1200" kern="1200">
         <a:solidFill>
           <a:schemeClr val="tx1"/>
@@ -579,7 +3181,7 @@
 </file>
 
 <file path=ppt/notesSlides/notesSlide1.xml><?xml version="1.0" encoding="utf-8"?>
-<p:notes xmlns:a="http://schemas.openxmlformats.org/drawingml/2006/main" xmlns:p="http://schemas.openxmlformats.org/presentationml/2006/main" xmlns:r="http://schemas.openxmlformats.org/officeDocument/2006/relationships">
+<p:notes xmlns:a="http://schemas.openxmlformats.org/drawingml/2006/main" xmlns:r="http://schemas.openxmlformats.org/officeDocument/2006/relationships" xmlns:p="http://schemas.openxmlformats.org/presentationml/2006/main">
   <p:cSld>
     <p:spTree>
       <p:nvGrpSpPr>
@@ -599,7 +3201,7 @@
         <p:nvSpPr>
           <p:cNvPr id="2" name="Slide Image Placeholder 1"/>
           <p:cNvSpPr>
-            <a:spLocks noGrp="1"/>
+            <a:spLocks noGrp="1" noRot="1" noChangeAspect="1"/>
           </p:cNvSpPr>
           <p:nvPr>
             <p:ph type="sldImg" idx="2"/>
@@ -614,7 +3216,7 @@
             <a:spLocks noGrp="1"/>
           </p:cNvSpPr>
           <p:nvPr>
-            <p:ph type="body" idx="3" sz="quarter"/>
+            <p:ph type="body" sz="quarter" idx="3"/>
           </p:nvPr>
         </p:nvSpPr>
         <p:spPr/>
@@ -635,7 +3237,7 @@
             <a:spLocks noGrp="1"/>
           </p:cNvSpPr>
           <p:nvPr>
-            <p:ph type="sldNum" idx="5" sz="quarter"/>
+            <p:ph type="sldNum" sz="quarter" idx="5"/>
           </p:nvPr>
         </p:nvSpPr>
         <p:spPr/>
@@ -686,10 +3288,9 @@
           <a:lstStyle/>
           <a:p>
             <a:r>
-              <a:rPr lang="en-US" smtClean="0"/>
+              <a:rPr lang="en-US"/>
               <a:t>Click to edit Master title style</a:t>
             </a:r>
-            <a:endParaRPr lang="en-US"/>
           </a:p>
         </p:txBody>
       </p:sp>
@@ -805,10 +3406,9 @@
           </a:lstStyle>
           <a:p>
             <a:r>
-              <a:rPr lang="en-US" smtClean="0"/>
+              <a:rPr lang="en-US"/>
               <a:t>Click to edit Master subtitle style</a:t>
             </a:r>
-            <a:endParaRPr lang="en-US"/>
           </a:p>
         </p:txBody>
       </p:sp>
@@ -829,7 +3429,7 @@
           <a:p>
             <a:fld id="{5BCAD085-E8A6-8845-BD4E-CB4CCA059FC4}" type="datetimeFigureOut">
               <a:rPr lang="en-US" smtClean="0"/>
-              <a:t>1/27/13</a:t>
+              <a:t>8/30/2026</a:t>
             </a:fld>
             <a:endParaRPr lang="en-US"/>
           </a:p>
@@ -923,10 +3523,9 @@
           <a:lstStyle/>
           <a:p>
             <a:r>
-              <a:rPr lang="en-US" smtClean="0"/>
+              <a:rPr lang="en-US"/>
               <a:t>Click to edit Master title style</a:t>
             </a:r>
-            <a:endParaRPr lang="en-US"/>
           </a:p>
         </p:txBody>
       </p:sp>
@@ -947,38 +3546,37 @@
           <a:p>
             <a:pPr lvl="0"/>
             <a:r>
-              <a:rPr lang="en-US" smtClean="0"/>
+              <a:rPr lang="en-US"/>
               <a:t>Click to edit Master text styles</a:t>
             </a:r>
           </a:p>
           <a:p>
             <a:pPr lvl="1"/>
             <a:r>
-              <a:rPr lang="en-US" smtClean="0"/>
+              <a:rPr lang="en-US"/>
               <a:t>Second level</a:t>
             </a:r>
           </a:p>
           <a:p>
             <a:pPr lvl="2"/>
             <a:r>
-              <a:rPr lang="en-US" smtClean="0"/>
+              <a:rPr lang="en-US"/>
               <a:t>Third level</a:t>
             </a:r>
           </a:p>
           <a:p>
             <a:pPr lvl="3"/>
             <a:r>
-              <a:rPr lang="en-US" smtClean="0"/>
+              <a:rPr lang="en-US"/>
               <a:t>Fourth level</a:t>
             </a:r>
           </a:p>
           <a:p>
             <a:pPr lvl="4"/>
             <a:r>
-              <a:rPr lang="en-US" smtClean="0"/>
+              <a:rPr lang="en-US"/>
               <a:t>Fifth level</a:t>
             </a:r>
-            <a:endParaRPr lang="en-US"/>
           </a:p>
         </p:txBody>
       </p:sp>
@@ -999,7 +3597,7 @@
           <a:p>
             <a:fld id="{5BCAD085-E8A6-8845-BD4E-CB4CCA059FC4}" type="datetimeFigureOut">
               <a:rPr lang="en-US" smtClean="0"/>
-              <a:t>1/27/13</a:t>
+              <a:t>8/30/2026</a:t>
             </a:fld>
             <a:endParaRPr lang="en-US"/>
           </a:p>
@@ -1098,10 +3696,9 @@
           <a:lstStyle/>
           <a:p>
             <a:r>
-              <a:rPr lang="en-US" smtClean="0"/>
+              <a:rPr lang="en-US"/>
               <a:t>Click to edit Master title style</a:t>
             </a:r>
-            <a:endParaRPr lang="en-US"/>
           </a:p>
         </p:txBody>
       </p:sp>
@@ -1127,38 +3724,37 @@
           <a:p>
             <a:pPr lvl="0"/>
             <a:r>
-              <a:rPr lang="en-US" smtClean="0"/>
+              <a:rPr lang="en-US"/>
               <a:t>Click to edit Master text styles</a:t>
             </a:r>
           </a:p>
           <a:p>
             <a:pPr lvl="1"/>
             <a:r>
-              <a:rPr lang="en-US" smtClean="0"/>
+              <a:rPr lang="en-US"/>
               <a:t>Second level</a:t>
             </a:r>
           </a:p>
           <a:p>
             <a:pPr lvl="2"/>
             <a:r>
-              <a:rPr lang="en-US" smtClean="0"/>
+              <a:rPr lang="en-US"/>
               <a:t>Third level</a:t>
             </a:r>
           </a:p>
           <a:p>
             <a:pPr lvl="3"/>
             <a:r>
-              <a:rPr lang="en-US" smtClean="0"/>
+              <a:rPr lang="en-US"/>
               <a:t>Fourth level</a:t>
             </a:r>
           </a:p>
           <a:p>
             <a:pPr lvl="4"/>
             <a:r>
-              <a:rPr lang="en-US" smtClean="0"/>
+              <a:rPr lang="en-US"/>
               <a:t>Fifth level</a:t>
             </a:r>
-            <a:endParaRPr lang="en-US"/>
           </a:p>
         </p:txBody>
       </p:sp>
@@ -1179,7 +3775,7 @@
           <a:p>
             <a:fld id="{5BCAD085-E8A6-8845-BD4E-CB4CCA059FC4}" type="datetimeFigureOut">
               <a:rPr lang="en-US" smtClean="0"/>
-              <a:t>1/27/13</a:t>
+              <a:t>8/30/2026</a:t>
             </a:fld>
             <a:endParaRPr lang="en-US"/>
           </a:p>
@@ -1273,10 +3869,9 @@
           <a:lstStyle/>
           <a:p>
             <a:r>
-              <a:rPr lang="en-US" smtClean="0"/>
+              <a:rPr lang="en-US"/>
               <a:t>Click to edit Master title style</a:t>
             </a:r>
-            <a:endParaRPr lang="en-US"/>
           </a:p>
         </p:txBody>
       </p:sp>
@@ -1297,38 +3892,37 @@
           <a:p>
             <a:pPr lvl="0"/>
             <a:r>
-              <a:rPr lang="en-US" smtClean="0"/>
+              <a:rPr lang="en-US"/>
               <a:t>Click to edit Master text styles</a:t>
             </a:r>
           </a:p>
           <a:p>
             <a:pPr lvl="1"/>
             <a:r>
-              <a:rPr lang="en-US" smtClean="0"/>
+              <a:rPr lang="en-US"/>
               <a:t>Second level</a:t>
             </a:r>
           </a:p>
           <a:p>
             <a:pPr lvl="2"/>
             <a:r>
-              <a:rPr lang="en-US" smtClean="0"/>
+              <a:rPr lang="en-US"/>
               <a:t>Third level</a:t>
             </a:r>
           </a:p>
           <a:p>
             <a:pPr lvl="3"/>
             <a:r>
-              <a:rPr lang="en-US" smtClean="0"/>
+              <a:rPr lang="en-US"/>
               <a:t>Fourth level</a:t>
             </a:r>
           </a:p>
           <a:p>
             <a:pPr lvl="4"/>
             <a:r>
-              <a:rPr lang="en-US" smtClean="0"/>
+              <a:rPr lang="en-US"/>
               <a:t>Fifth level</a:t>
             </a:r>
-            <a:endParaRPr lang="en-US"/>
           </a:p>
         </p:txBody>
       </p:sp>
@@ -1349,7 +3943,7 @@
           <a:p>
             <a:fld id="{5BCAD085-E8A6-8845-BD4E-CB4CCA059FC4}" type="datetimeFigureOut">
               <a:rPr lang="en-US" smtClean="0"/>
-              <a:t>1/27/13</a:t>
+              <a:t>8/30/2026</a:t>
             </a:fld>
             <a:endParaRPr lang="en-US"/>
           </a:p>
@@ -1452,10 +4046,9 @@
           </a:lstStyle>
           <a:p>
             <a:r>
-              <a:rPr lang="en-US" smtClean="0"/>
+              <a:rPr lang="en-US"/>
               <a:t>Click to edit Master title style</a:t>
             </a:r>
-            <a:endParaRPr lang="en-US"/>
           </a:p>
         </p:txBody>
       </p:sp>
@@ -1572,7 +4165,7 @@
           <a:p>
             <a:pPr lvl="0"/>
             <a:r>
-              <a:rPr lang="en-US" smtClean="0"/>
+              <a:rPr lang="en-US"/>
               <a:t>Click to edit Master text styles</a:t>
             </a:r>
           </a:p>
@@ -1595,7 +4188,7 @@
           <a:p>
             <a:fld id="{5BCAD085-E8A6-8845-BD4E-CB4CCA059FC4}" type="datetimeFigureOut">
               <a:rPr lang="en-US" smtClean="0"/>
-              <a:t>1/27/13</a:t>
+              <a:t>8/30/2026</a:t>
             </a:fld>
             <a:endParaRPr lang="en-US"/>
           </a:p>
@@ -1689,10 +4282,9 @@
           <a:lstStyle/>
           <a:p>
             <a:r>
-              <a:rPr lang="en-US" smtClean="0"/>
+              <a:rPr lang="en-US"/>
               <a:t>Click to edit Master title style</a:t>
             </a:r>
-            <a:endParaRPr lang="en-US"/>
           </a:p>
         </p:txBody>
       </p:sp>
@@ -1746,38 +4338,37 @@
           <a:p>
             <a:pPr lvl="0"/>
             <a:r>
-              <a:rPr lang="en-US" smtClean="0"/>
+              <a:rPr lang="en-US"/>
               <a:t>Click to edit Master text styles</a:t>
             </a:r>
           </a:p>
           <a:p>
             <a:pPr lvl="1"/>
             <a:r>
-              <a:rPr lang="en-US" smtClean="0"/>
+              <a:rPr lang="en-US"/>
               <a:t>Second level</a:t>
             </a:r>
           </a:p>
           <a:p>
             <a:pPr lvl="2"/>
             <a:r>
-              <a:rPr lang="en-US" smtClean="0"/>
+              <a:rPr lang="en-US"/>
               <a:t>Third level</a:t>
             </a:r>
           </a:p>
           <a:p>
             <a:pPr lvl="3"/>
             <a:r>
-              <a:rPr lang="en-US" smtClean="0"/>
+              <a:rPr lang="en-US"/>
               <a:t>Fourth level</a:t>
             </a:r>
           </a:p>
           <a:p>
             <a:pPr lvl="4"/>
             <a:r>
-              <a:rPr lang="en-US" smtClean="0"/>
+              <a:rPr lang="en-US"/>
               <a:t>Fifth level</a:t>
             </a:r>
-            <a:endParaRPr lang="en-US"/>
           </a:p>
         </p:txBody>
       </p:sp>
@@ -1831,38 +4422,37 @@
           <a:p>
             <a:pPr lvl="0"/>
             <a:r>
-              <a:rPr lang="en-US" smtClean="0"/>
+              <a:rPr lang="en-US"/>
               <a:t>Click to edit Master text styles</a:t>
             </a:r>
           </a:p>
           <a:p>
             <a:pPr lvl="1"/>
             <a:r>
-              <a:rPr lang="en-US" smtClean="0"/>
+              <a:rPr lang="en-US"/>
               <a:t>Second level</a:t>
             </a:r>
           </a:p>
           <a:p>
             <a:pPr lvl="2"/>
             <a:r>
-              <a:rPr lang="en-US" smtClean="0"/>
+              <a:rPr lang="en-US"/>
               <a:t>Third level</a:t>
             </a:r>
           </a:p>
           <a:p>
             <a:pPr lvl="3"/>
             <a:r>
-              <a:rPr lang="en-US" smtClean="0"/>
+              <a:rPr lang="en-US"/>
               <a:t>Fourth level</a:t>
             </a:r>
           </a:p>
           <a:p>
             <a:pPr lvl="4"/>
             <a:r>
-              <a:rPr lang="en-US" smtClean="0"/>
+              <a:rPr lang="en-US"/>
               <a:t>Fifth level</a:t>
             </a:r>
-            <a:endParaRPr lang="en-US"/>
           </a:p>
         </p:txBody>
       </p:sp>
@@ -1883,7 +4473,7 @@
           <a:p>
             <a:fld id="{5BCAD085-E8A6-8845-BD4E-CB4CCA059FC4}" type="datetimeFigureOut">
               <a:rPr lang="en-US" smtClean="0"/>
-              <a:t>1/27/13</a:t>
+              <a:t>8/30/2026</a:t>
             </a:fld>
             <a:endParaRPr lang="en-US"/>
           </a:p>
@@ -1981,10 +4571,9 @@
           </a:lstStyle>
           <a:p>
             <a:r>
-              <a:rPr lang="en-US" smtClean="0"/>
+              <a:rPr lang="en-US"/>
               <a:t>Click to edit Master title style</a:t>
             </a:r>
-            <a:endParaRPr lang="en-US"/>
           </a:p>
         </p:txBody>
       </p:sp>
@@ -2047,7 +4636,7 @@
           <a:p>
             <a:pPr lvl="0"/>
             <a:r>
-              <a:rPr lang="en-US" smtClean="0"/>
+              <a:rPr lang="en-US"/>
               <a:t>Click to edit Master text styles</a:t>
             </a:r>
           </a:p>
@@ -2103,38 +4692,37 @@
           <a:p>
             <a:pPr lvl="0"/>
             <a:r>
-              <a:rPr lang="en-US" smtClean="0"/>
+              <a:rPr lang="en-US"/>
               <a:t>Click to edit Master text styles</a:t>
             </a:r>
           </a:p>
           <a:p>
             <a:pPr lvl="1"/>
             <a:r>
-              <a:rPr lang="en-US" smtClean="0"/>
+              <a:rPr lang="en-US"/>
               <a:t>Second level</a:t>
             </a:r>
           </a:p>
           <a:p>
             <a:pPr lvl="2"/>
             <a:r>
-              <a:rPr lang="en-US" smtClean="0"/>
+              <a:rPr lang="en-US"/>
               <a:t>Third level</a:t>
             </a:r>
           </a:p>
           <a:p>
             <a:pPr lvl="3"/>
             <a:r>
-              <a:rPr lang="en-US" smtClean="0"/>
+              <a:rPr lang="en-US"/>
               <a:t>Fourth level</a:t>
             </a:r>
           </a:p>
           <a:p>
             <a:pPr lvl="4"/>
             <a:r>
-              <a:rPr lang="en-US" smtClean="0"/>
+              <a:rPr lang="en-US"/>
               <a:t>Fifth level</a:t>
             </a:r>
-            <a:endParaRPr lang="en-US"/>
           </a:p>
         </p:txBody>
       </p:sp>
@@ -2197,7 +4785,7 @@
           <a:p>
             <a:pPr lvl="0"/>
             <a:r>
-              <a:rPr lang="en-US" smtClean="0"/>
+              <a:rPr lang="en-US"/>
               <a:t>Click to edit Master text styles</a:t>
             </a:r>
           </a:p>
@@ -2253,38 +4841,37 @@
           <a:p>
             <a:pPr lvl="0"/>
             <a:r>
-              <a:rPr lang="en-US" smtClean="0"/>
+              <a:rPr lang="en-US"/>
               <a:t>Click to edit Master text styles</a:t>
             </a:r>
           </a:p>
           <a:p>
             <a:pPr lvl="1"/>
             <a:r>
-              <a:rPr lang="en-US" smtClean="0"/>
+              <a:rPr lang="en-US"/>
               <a:t>Second level</a:t>
             </a:r>
           </a:p>
           <a:p>
             <a:pPr lvl="2"/>
             <a:r>
-              <a:rPr lang="en-US" smtClean="0"/>
+              <a:rPr lang="en-US"/>
               <a:t>Third level</a:t>
             </a:r>
           </a:p>
           <a:p>
             <a:pPr lvl="3"/>
             <a:r>
-              <a:rPr lang="en-US" smtClean="0"/>
+              <a:rPr lang="en-US"/>
               <a:t>Fourth level</a:t>
             </a:r>
           </a:p>
           <a:p>
             <a:pPr lvl="4"/>
             <a:r>
-              <a:rPr lang="en-US" smtClean="0"/>
+              <a:rPr lang="en-US"/>
               <a:t>Fifth level</a:t>
             </a:r>
-            <a:endParaRPr lang="en-US"/>
           </a:p>
         </p:txBody>
       </p:sp>
@@ -2305,7 +4892,7 @@
           <a:p>
             <a:fld id="{5BCAD085-E8A6-8845-BD4E-CB4CCA059FC4}" type="datetimeFigureOut">
               <a:rPr lang="en-US" smtClean="0"/>
-              <a:t>1/27/13</a:t>
+              <a:t>8/30/2026</a:t>
             </a:fld>
             <a:endParaRPr lang="en-US"/>
           </a:p>
@@ -2399,10 +4986,9 @@
           <a:lstStyle/>
           <a:p>
             <a:r>
-              <a:rPr lang="en-US" smtClean="0"/>
+              <a:rPr lang="en-US"/>
               <a:t>Click to edit Master title style</a:t>
             </a:r>
-            <a:endParaRPr lang="en-US"/>
           </a:p>
         </p:txBody>
       </p:sp>
@@ -2423,7 +5009,7 @@
           <a:p>
             <a:fld id="{5BCAD085-E8A6-8845-BD4E-CB4CCA059FC4}" type="datetimeFigureOut">
               <a:rPr lang="en-US" smtClean="0"/>
-              <a:t>1/27/13</a:t>
+              <a:t>8/30/2026</a:t>
             </a:fld>
             <a:endParaRPr lang="en-US"/>
           </a:p>
@@ -2518,7 +5104,7 @@
           <a:p>
             <a:fld id="{5BCAD085-E8A6-8845-BD4E-CB4CCA059FC4}" type="datetimeFigureOut">
               <a:rPr lang="en-US" smtClean="0"/>
-              <a:t>1/27/13</a:t>
+              <a:t>8/30/2026</a:t>
             </a:fld>
             <a:endParaRPr lang="en-US"/>
           </a:p>
@@ -2621,10 +5207,9 @@
           </a:lstStyle>
           <a:p>
             <a:r>
-              <a:rPr lang="en-US" smtClean="0"/>
+              <a:rPr lang="en-US"/>
               <a:t>Click to edit Master title style</a:t>
             </a:r>
-            <a:endParaRPr lang="en-US"/>
           </a:p>
         </p:txBody>
       </p:sp>
@@ -2678,38 +5263,37 @@
           <a:p>
             <a:pPr lvl="0"/>
             <a:r>
-              <a:rPr lang="en-US" smtClean="0"/>
+              <a:rPr lang="en-US"/>
               <a:t>Click to edit Master text styles</a:t>
             </a:r>
           </a:p>
           <a:p>
             <a:pPr lvl="1"/>
             <a:r>
-              <a:rPr lang="en-US" smtClean="0"/>
+              <a:rPr lang="en-US"/>
               <a:t>Second level</a:t>
             </a:r>
           </a:p>
           <a:p>
             <a:pPr lvl="2"/>
             <a:r>
-              <a:rPr lang="en-US" smtClean="0"/>
+              <a:rPr lang="en-US"/>
               <a:t>Third level</a:t>
             </a:r>
           </a:p>
           <a:p>
             <a:pPr lvl="3"/>
             <a:r>
-              <a:rPr lang="en-US" smtClean="0"/>
+              <a:rPr lang="en-US"/>
               <a:t>Fourth level</a:t>
             </a:r>
           </a:p>
           <a:p>
             <a:pPr lvl="4"/>
             <a:r>
-              <a:rPr lang="en-US" smtClean="0"/>
+              <a:rPr lang="en-US"/>
               <a:t>Fifth level</a:t>
             </a:r>
-            <a:endParaRPr lang="en-US"/>
           </a:p>
         </p:txBody>
       </p:sp>
@@ -2772,7 +5356,7 @@
           <a:p>
             <a:pPr lvl="0"/>
             <a:r>
-              <a:rPr lang="en-US" smtClean="0"/>
+              <a:rPr lang="en-US"/>
               <a:t>Click to edit Master text styles</a:t>
             </a:r>
           </a:p>
@@ -2795,7 +5379,7 @@
           <a:p>
             <a:fld id="{5BCAD085-E8A6-8845-BD4E-CB4CCA059FC4}" type="datetimeFigureOut">
               <a:rPr lang="en-US" smtClean="0"/>
-              <a:t>1/27/13</a:t>
+              <a:t>8/30/2026</a:t>
             </a:fld>
             <a:endParaRPr lang="en-US"/>
           </a:p>
@@ -2898,10 +5482,9 @@
           </a:lstStyle>
           <a:p>
             <a:r>
-              <a:rPr lang="en-US" smtClean="0"/>
+              <a:rPr lang="en-US"/>
               <a:t>Click to edit Master title style</a:t>
             </a:r>
-            <a:endParaRPr lang="en-US"/>
           </a:p>
         </p:txBody>
       </p:sp>
@@ -3025,7 +5608,7 @@
           <a:p>
             <a:pPr lvl="0"/>
             <a:r>
-              <a:rPr lang="en-US" smtClean="0"/>
+              <a:rPr lang="en-US"/>
               <a:t>Click to edit Master text styles</a:t>
             </a:r>
           </a:p>
@@ -3048,7 +5631,7 @@
           <a:p>
             <a:fld id="{5BCAD085-E8A6-8845-BD4E-CB4CCA059FC4}" type="datetimeFigureOut">
               <a:rPr lang="en-US" smtClean="0"/>
-              <a:t>1/27/13</a:t>
+              <a:t>8/30/2026</a:t>
             </a:fld>
             <a:endParaRPr lang="en-US"/>
           </a:p>
@@ -3157,10 +5740,9 @@
           <a:lstStyle/>
           <a:p>
             <a:r>
-              <a:rPr lang="en-US" smtClean="0"/>
+              <a:rPr lang="en-US"/>
               <a:t>Click to edit Master title style</a:t>
             </a:r>
-            <a:endParaRPr lang="en-US"/>
           </a:p>
         </p:txBody>
       </p:sp>
@@ -3191,38 +5773,37 @@
           <a:p>
             <a:pPr lvl="0"/>
             <a:r>
-              <a:rPr lang="en-US" smtClean="0"/>
+              <a:rPr lang="en-US"/>
               <a:t>Click to edit Master text styles</a:t>
             </a:r>
           </a:p>
           <a:p>
             <a:pPr lvl="1"/>
             <a:r>
-              <a:rPr lang="en-US" smtClean="0"/>
+              <a:rPr lang="en-US"/>
               <a:t>Second level</a:t>
             </a:r>
           </a:p>
           <a:p>
             <a:pPr lvl="2"/>
             <a:r>
-              <a:rPr lang="en-US" smtClean="0"/>
+              <a:rPr lang="en-US"/>
               <a:t>Third level</a:t>
             </a:r>
           </a:p>
           <a:p>
             <a:pPr lvl="3"/>
             <a:r>
-              <a:rPr lang="en-US" smtClean="0"/>
+              <a:rPr lang="en-US"/>
               <a:t>Fourth level</a:t>
             </a:r>
           </a:p>
           <a:p>
             <a:pPr lvl="4"/>
             <a:r>
-              <a:rPr lang="en-US" smtClean="0"/>
+              <a:rPr lang="en-US"/>
               <a:t>Fifth level</a:t>
             </a:r>
-            <a:endParaRPr lang="en-US"/>
           </a:p>
         </p:txBody>
       </p:sp>
@@ -3261,7 +5842,7 @@
           <a:p>
             <a:fld id="{5BCAD085-E8A6-8845-BD4E-CB4CCA059FC4}" type="datetimeFigureOut">
               <a:rPr lang="en-US" smtClean="0"/>
-              <a:t>1/27/13</a:t>
+              <a:t>8/30/2026</a:t>
             </a:fld>
             <a:endParaRPr lang="en-US"/>
           </a:p>
@@ -3620,7 +6201,7 @@
 </file>
 
 <file path=ppt/slides/slide1.xml><?xml version="1.0" encoding="utf-8"?>
-<p:sld xmlns:a="http://schemas.openxmlformats.org/drawingml/2006/main" xmlns:p="http://schemas.openxmlformats.org/presentationml/2006/main" xmlns:r="http://schemas.openxmlformats.org/officeDocument/2006/relationships">
+<p:sld xmlns:a="http://schemas.openxmlformats.org/drawingml/2006/main" xmlns:r="http://schemas.openxmlformats.org/officeDocument/2006/relationships" xmlns:p="http://schemas.openxmlformats.org/presentationml/2006/main">
   <p:cSld>
     <p:spTree>
       <p:nvGrpSpPr>
@@ -3628,7 +6209,14 @@
         <p:cNvGrpSpPr/>
         <p:nvPr/>
       </p:nvGrpSpPr>
-      <p:grpSpPr/>
+      <p:grpSpPr>
+        <a:xfrm>
+          <a:off x="0" y="0"/>
+          <a:ext cx="0" cy="0"/>
+          <a:chOff x="0" y="0"/>
+          <a:chExt cx="0" cy="0"/>
+        </a:xfrm>
+      </p:grpSpPr>
       <p:sp>
         <p:nvSpPr>
           <p:cNvPr id="2" name="TextBox 1"/>
@@ -3696,15 +6284,12 @@
             </a:r>
           </a:p>
           <a:p>
-            <a:r>
-              <a:rPr sz="1500" b="0">
-                <a:solidFill>
-                  <a:srgbClr val="555F6D"/>
-                </a:solidFill>
-                <a:latin typeface="Aptos"/>
-              </a:rPr>
-              <a:t/>
-            </a:r>
+            <a:endParaRPr sz="1500" b="0">
+              <a:solidFill>
+                <a:srgbClr val="555F6D"/>
+              </a:solidFill>
+              <a:latin typeface="Aptos"/>
+            </a:endParaRPr>
           </a:p>
           <a:p>
             <a:r>
@@ -3762,15 +6347,12 @@
             </a:r>
           </a:p>
           <a:p>
-            <a:r>
-              <a:rPr sz="1500" b="0">
-                <a:solidFill>
-                  <a:srgbClr val="555F6D"/>
-                </a:solidFill>
-                <a:latin typeface="Aptos"/>
-              </a:rPr>
-              <a:t/>
-            </a:r>
+            <a:endParaRPr sz="1500" b="0">
+              <a:solidFill>
+                <a:srgbClr val="555F6D"/>
+              </a:solidFill>
+              <a:latin typeface="Aptos"/>
+            </a:endParaRPr>
           </a:p>
           <a:p>
             <a:r>
@@ -3795,15 +6377,12 @@
             </a:r>
           </a:p>
           <a:p>
-            <a:r>
-              <a:rPr sz="1500" b="0">
-                <a:solidFill>
-                  <a:srgbClr val="555F6D"/>
-                </a:solidFill>
-                <a:latin typeface="Aptos"/>
-              </a:rPr>
-              <a:t/>
-            </a:r>
+            <a:endParaRPr sz="1500" b="0">
+              <a:solidFill>
+                <a:srgbClr val="555F6D"/>
+              </a:solidFill>
+              <a:latin typeface="Aptos"/>
+            </a:endParaRPr>
           </a:p>
           <a:p>
             <a:r>
@@ -3817,15 +6396,12 @@
             </a:r>
           </a:p>
           <a:p>
-            <a:r>
-              <a:rPr sz="1500" b="0">
-                <a:solidFill>
-                  <a:srgbClr val="555F6D"/>
-                </a:solidFill>
-                <a:latin typeface="Aptos"/>
-              </a:rPr>
-              <a:t/>
-            </a:r>
+            <a:endParaRPr sz="1500" b="0">
+              <a:solidFill>
+                <a:srgbClr val="555F6D"/>
+              </a:solidFill>
+              <a:latin typeface="Aptos"/>
+            </a:endParaRPr>
           </a:p>
           <a:p>
             <a:r>
@@ -3860,7 +6436,7 @@
 </file>
 
 <file path=ppt/slides/slide2.xml><?xml version="1.0" encoding="utf-8"?>
-<p:sld xmlns:a="http://schemas.openxmlformats.org/drawingml/2006/main" xmlns:p="http://schemas.openxmlformats.org/presentationml/2006/main" xmlns:r="http://schemas.openxmlformats.org/officeDocument/2006/relationships">
+<p:sld xmlns:a="http://schemas.openxmlformats.org/drawingml/2006/main" xmlns:r="http://schemas.openxmlformats.org/officeDocument/2006/relationships" xmlns:p="http://schemas.openxmlformats.org/presentationml/2006/main">
   <p:cSld>
     <p:spTree>
       <p:nvGrpSpPr>
@@ -3868,7 +6444,14 @@
         <p:cNvGrpSpPr/>
         <p:nvPr/>
       </p:nvGrpSpPr>
-      <p:grpSpPr/>
+      <p:grpSpPr>
+        <a:xfrm>
+          <a:off x="0" y="0"/>
+          <a:ext cx="0" cy="0"/>
+          <a:chOff x="0" y="0"/>
+          <a:chExt cx="0" cy="0"/>
+        </a:xfrm>
+      </p:grpSpPr>
       <p:sp>
         <p:nvSpPr>
           <p:cNvPr id="2" name="TextBox 1"/>
@@ -4000,7 +6583,7 @@
         </p:xfrm>
         <a:graphic>
           <a:graphicData uri="http://schemas.openxmlformats.org/drawingml/2006/chart">
-            <c:chart xmlns:c="http://schemas.openxmlformats.org/drawingml/2006/chart" r:id="rId2"/>
+            <c:chart xmlns:c="http://schemas.openxmlformats.org/drawingml/2006/chart" xmlns:r="http://schemas.openxmlformats.org/officeDocument/2006/relationships" r:id="rId3"/>
           </a:graphicData>
         </a:graphic>
       </p:graphicFrame>
@@ -4013,7 +6596,7 @@
 </file>
 
 <file path=ppt/slides/slide3.xml><?xml version="1.0" encoding="utf-8"?>
-<p:sld xmlns:a="http://schemas.openxmlformats.org/drawingml/2006/main" xmlns:p="http://schemas.openxmlformats.org/presentationml/2006/main" xmlns:r="http://schemas.openxmlformats.org/officeDocument/2006/relationships">
+<p:sld xmlns:a="http://schemas.openxmlformats.org/drawingml/2006/main" xmlns:r="http://schemas.openxmlformats.org/officeDocument/2006/relationships" xmlns:p="http://schemas.openxmlformats.org/presentationml/2006/main">
   <p:cSld>
     <p:spTree>
       <p:nvGrpSpPr>
@@ -4021,7 +6604,14 @@
         <p:cNvGrpSpPr/>
         <p:nvPr/>
       </p:nvGrpSpPr>
-      <p:grpSpPr/>
+      <p:grpSpPr>
+        <a:xfrm>
+          <a:off x="0" y="0"/>
+          <a:ext cx="0" cy="0"/>
+          <a:chOff x="0" y="0"/>
+          <a:chExt cx="0" cy="0"/>
+        </a:xfrm>
+      </p:grpSpPr>
       <p:sp>
         <p:nvSpPr>
           <p:cNvPr id="2" name="TextBox 1"/>
@@ -4090,94 +6680,34 @@
           </a:p>
         </p:txBody>
       </p:sp>
-      <p:sp>
-        <p:nvSpPr>
-          <p:cNvPr id="4" name="TextBox 3"/>
-          <p:cNvSpPr txBox="1"/>
-          <p:nvPr/>
-        </p:nvSpPr>
-        <p:spPr>
-          <a:xfrm>
-            <a:off x="640080" y="2103120"/>
-            <a:ext cx="10881360" cy="3840480"/>
-          </a:xfrm>
-          <a:prstGeom prst="rect">
-            <a:avLst/>
-          </a:prstGeom>
-          <a:noFill/>
-          <a:ln w="12700">
-            <a:solidFill>
-              <a:srgbClr val="555F6D"/>
-            </a:solidFill>
-          </a:ln>
-        </p:spPr>
-        <p:txBody>
-          <a:bodyPr wrap="square">
-            <a:spAutoFit/>
-          </a:bodyPr>
-          <a:lstStyle/>
-          <a:p>
-            <a:r>
-              <a:rPr sz="1600">
-                <a:solidFill>
-                  <a:srgbClr val="555F6D"/>
-                </a:solidFill>
-              </a:rPr>
-              <a:t>Put the SmartArt here.</a:t>
-            </a:r>
-          </a:p>
-          <a:p>
-            <a:r>
-              <a:rPr sz="1600">
-                <a:solidFill>
-                  <a:srgbClr val="555F6D"/>
-                </a:solidFill>
-              </a:rPr>
-              <a:t/>
-            </a:r>
-          </a:p>
-          <a:p>
-            <a:r>
-              <a:rPr sz="1600">
-                <a:solidFill>
-                  <a:srgbClr val="555F6D"/>
-                </a:solidFill>
-              </a:rPr>
-              <a:t>Insert ▸ SmartArt ▸ Process ▸ Basic Process, then type into the three boxes:</a:t>
-            </a:r>
-          </a:p>
-          <a:p>
-            <a:r>
-              <a:rPr sz="1600">
-                <a:solidFill>
-                  <a:srgbClr val="555F6D"/>
-                </a:solidFill>
-              </a:rPr>
-              <a:t>{{Name}}     {{Region}}     Renewal {{Renewal|date:d MMM}}</a:t>
-            </a:r>
-          </a:p>
-          <a:p>
-            <a:r>
-              <a:rPr sz="1600">
-                <a:solidFill>
-                  <a:srgbClr val="555F6D"/>
-                </a:solidFill>
-              </a:rPr>
-              <a:t/>
-            </a:r>
-          </a:p>
-          <a:p>
-            <a:r>
-              <a:rPr sz="1600">
-                <a:solidFill>
-                  <a:srgbClr val="555F6D"/>
-                </a:solidFill>
-              </a:rPr>
-              <a:t>Then delete this box.</a:t>
-            </a:r>
-          </a:p>
-        </p:txBody>
-      </p:sp>
+      <p:graphicFrame>
+        <p:nvGraphicFramePr>
+          <p:cNvPr id="5" name="Diagram 4">
+            <a:extLst>
+              <a:ext uri="{FF2B5EF4-FFF2-40B4-BE49-F238E27FC236}">
+                <a16:creationId xmlns:a16="http://schemas.microsoft.com/office/drawing/2014/main" id="{92114836-83A7-9C47-6FF0-12E1166CD6B6}"/>
+              </a:ext>
+            </a:extLst>
+          </p:cNvPr>
+          <p:cNvGraphicFramePr/>
+          <p:nvPr>
+            <p:extLst>
+              <p:ext uri="{D42A27DB-BD31-4B8C-83A1-F6EECF244321}">
+                <p14:modId xmlns:p14="http://schemas.microsoft.com/office/powerpoint/2010/main" val="2783248400"/>
+              </p:ext>
+            </p:extLst>
+          </p:nvPr>
+        </p:nvGraphicFramePr>
+        <p:xfrm>
+          <a:off x="2016760" y="1027853"/>
+          <a:ext cx="8128000" cy="5418667"/>
+        </p:xfrm>
+        <a:graphic>
+          <a:graphicData uri="http://schemas.openxmlformats.org/drawingml/2006/diagram">
+            <dgm:relIds xmlns:dgm="http://schemas.openxmlformats.org/drawingml/2006/diagram" xmlns:r="http://schemas.openxmlformats.org/officeDocument/2006/relationships" r:dm="rId2" r:lo="rId3" r:qs="rId4" r:cs="rId5"/>
+          </a:graphicData>
+        </a:graphic>
+      </p:graphicFrame>
     </p:spTree>
   </p:cSld>
   <p:clrMapOvr>
@@ -4517,44 +7047,44 @@
         <a:sysClr val="window" lastClr="FFFFFF"/>
       </a:lt1>
       <a:dk2>
-        <a:srgbClr val="1F497D"/>
+        <a:srgbClr val="0E2841"/>
       </a:dk2>
       <a:lt2>
-        <a:srgbClr val="EEECE1"/>
+        <a:srgbClr val="E8E8E8"/>
       </a:lt2>
       <a:accent1>
-        <a:srgbClr val="4F81BD"/>
+        <a:srgbClr val="156082"/>
       </a:accent1>
       <a:accent2>
-        <a:srgbClr val="C0504D"/>
+        <a:srgbClr val="E97132"/>
       </a:accent2>
       <a:accent3>
-        <a:srgbClr val="9BBB59"/>
+        <a:srgbClr val="196B24"/>
       </a:accent3>
       <a:accent4>
-        <a:srgbClr val="8064A2"/>
+        <a:srgbClr val="0F9ED5"/>
       </a:accent4>
       <a:accent5>
-        <a:srgbClr val="4BACC6"/>
+        <a:srgbClr val="A02B93"/>
       </a:accent5>
       <a:accent6>
-        <a:srgbClr val="F79646"/>
+        <a:srgbClr val="4EA72E"/>
       </a:accent6>
       <a:hlink>
-        <a:srgbClr val="0000FF"/>
+        <a:srgbClr val="467886"/>
       </a:hlink>
       <a:folHlink>
-        <a:srgbClr val="800080"/>
+        <a:srgbClr val="96607D"/>
       </a:folHlink>
     </a:clrScheme>
     <a:fontScheme name="Office">
       <a:majorFont>
-        <a:latin typeface="Calibri"/>
+        <a:latin typeface="Aptos Display" panose="02110004020202020204"/>
         <a:ea typeface=""/>
         <a:cs typeface=""/>
-        <a:font script="Jpan" typeface="ＭＳ Ｐゴシック"/>
+        <a:font script="Jpan" typeface="游ゴシック Light"/>
         <a:font script="Hang" typeface="맑은 고딕"/>
-        <a:font script="Hans" typeface="宋体"/>
+        <a:font script="Hans" typeface="等线 Light"/>
         <a:font script="Hant" typeface="新細明體"/>
         <a:font script="Arab" typeface="Times New Roman"/>
         <a:font script="Hebr" typeface="Times New Roman"/>
@@ -4582,14 +7112,31 @@
         <a:font script="Viet" typeface="Times New Roman"/>
         <a:font script="Uigh" typeface="Microsoft Uighur"/>
         <a:font script="Geor" typeface="Sylfaen"/>
+        <a:font script="Armn" typeface="Arial"/>
+        <a:font script="Bugi" typeface="Leelawadee UI"/>
+        <a:font script="Bopo" typeface="Microsoft JhengHei"/>
+        <a:font script="Java" typeface="Javanese Text"/>
+        <a:font script="Lisu" typeface="Segoe UI"/>
+        <a:font script="Mymr" typeface="Myanmar Text"/>
+        <a:font script="Nkoo" typeface="Ebrima"/>
+        <a:font script="Olck" typeface="Nirmala UI"/>
+        <a:font script="Osma" typeface="Ebrima"/>
+        <a:font script="Phag" typeface="Phagspa"/>
+        <a:font script="Syrn" typeface="Estrangelo Edessa"/>
+        <a:font script="Syrj" typeface="Estrangelo Edessa"/>
+        <a:font script="Syre" typeface="Estrangelo Edessa"/>
+        <a:font script="Sora" typeface="Nirmala UI"/>
+        <a:font script="Tale" typeface="Microsoft Tai Le"/>
+        <a:font script="Talu" typeface="Microsoft New Tai Lue"/>
+        <a:font script="Tfng" typeface="Ebrima"/>
       </a:majorFont>
       <a:minorFont>
-        <a:latin typeface="Calibri"/>
+        <a:latin typeface="Aptos" panose="02110004020202020204"/>
         <a:ea typeface=""/>
         <a:cs typeface=""/>
-        <a:font script="Jpan" typeface="ＭＳ Ｐゴシック"/>
+        <a:font script="Jpan" typeface="游ゴシック"/>
         <a:font script="Hang" typeface="맑은 고딕"/>
-        <a:font script="Hans" typeface="宋体"/>
+        <a:font script="Hans" typeface="等线"/>
         <a:font script="Hant" typeface="新細明體"/>
         <a:font script="Arab" typeface="Arial"/>
         <a:font script="Hebr" typeface="Arial"/>
@@ -4617,6 +7164,23 @@
         <a:font script="Viet" typeface="Arial"/>
         <a:font script="Uigh" typeface="Microsoft Uighur"/>
         <a:font script="Geor" typeface="Sylfaen"/>
+        <a:font script="Armn" typeface="Arial"/>
+        <a:font script="Bugi" typeface="Leelawadee UI"/>
+        <a:font script="Bopo" typeface="Microsoft JhengHei"/>
+        <a:font script="Java" typeface="Javanese Text"/>
+        <a:font script="Lisu" typeface="Segoe UI"/>
+        <a:font script="Mymr" typeface="Myanmar Text"/>
+        <a:font script="Nkoo" typeface="Ebrima"/>
+        <a:font script="Olck" typeface="Nirmala UI"/>
+        <a:font script="Osma" typeface="Ebrima"/>
+        <a:font script="Phag" typeface="Phagspa"/>
+        <a:font script="Syrn" typeface="Estrangelo Edessa"/>
+        <a:font script="Syrj" typeface="Estrangelo Edessa"/>
+        <a:font script="Syre" typeface="Estrangelo Edessa"/>
+        <a:font script="Sora" typeface="Nirmala UI"/>
+        <a:font script="Tale" typeface="Microsoft Tai Le"/>
+        <a:font script="Talu" typeface="Microsoft New Tai Lue"/>
+        <a:font script="Tfng" typeface="Ebrima"/>
       </a:minorFont>
     </a:fontScheme>
     <a:fmtScheme name="Office">
@@ -4628,180 +7192,136 @@
           <a:gsLst>
             <a:gs pos="0">
               <a:schemeClr val="phClr">
-                <a:tint val="50000"/>
-                <a:satMod val="300000"/>
+                <a:lumMod val="110000"/>
+                <a:satMod val="105000"/>
+                <a:tint val="67000"/>
               </a:schemeClr>
             </a:gs>
-            <a:gs pos="35000">
+            <a:gs pos="50000">
               <a:schemeClr val="phClr">
-                <a:tint val="37000"/>
-                <a:satMod val="300000"/>
+                <a:lumMod val="105000"/>
+                <a:satMod val="103000"/>
+                <a:tint val="73000"/>
               </a:schemeClr>
             </a:gs>
             <a:gs pos="100000">
               <a:schemeClr val="phClr">
-                <a:tint val="15000"/>
-                <a:satMod val="350000"/>
+                <a:lumMod val="105000"/>
+                <a:satMod val="109000"/>
+                <a:tint val="81000"/>
               </a:schemeClr>
             </a:gs>
           </a:gsLst>
-          <a:lin ang="16200000" scaled="1"/>
+          <a:lin ang="5400000" scaled="0"/>
         </a:gradFill>
         <a:gradFill rotWithShape="1">
           <a:gsLst>
             <a:gs pos="0">
               <a:schemeClr val="phClr">
-                <a:tint val="100000"/>
+                <a:satMod val="103000"/>
+                <a:lumMod val="102000"/>
+                <a:tint val="94000"/>
+              </a:schemeClr>
+            </a:gs>
+            <a:gs pos="50000">
+              <a:schemeClr val="phClr">
+                <a:satMod val="110000"/>
+                <a:lumMod val="100000"/>
                 <a:shade val="100000"/>
-                <a:satMod val="130000"/>
               </a:schemeClr>
             </a:gs>
             <a:gs pos="100000">
               <a:schemeClr val="phClr">
-                <a:tint val="50000"/>
-                <a:shade val="100000"/>
-                <a:satMod val="350000"/>
+                <a:lumMod val="99000"/>
+                <a:satMod val="120000"/>
+                <a:shade val="78000"/>
               </a:schemeClr>
             </a:gs>
           </a:gsLst>
-          <a:lin ang="16200000" scaled="0"/>
+          <a:lin ang="5400000" scaled="0"/>
         </a:gradFill>
       </a:fillStyleLst>
       <a:lnStyleLst>
-        <a:ln w="9525" cap="flat" cmpd="sng" algn="ctr">
+        <a:ln w="12700" cap="flat" cmpd="sng" algn="ctr">
           <a:solidFill>
-            <a:schemeClr val="phClr">
-              <a:shade val="95000"/>
-              <a:satMod val="105000"/>
-            </a:schemeClr>
+            <a:schemeClr val="phClr"/>
           </a:solidFill>
           <a:prstDash val="solid"/>
+          <a:miter lim="800000"/>
+        </a:ln>
+        <a:ln w="19050" cap="flat" cmpd="sng" algn="ctr">
+          <a:solidFill>
+            <a:schemeClr val="phClr"/>
+          </a:solidFill>
+          <a:prstDash val="solid"/>
+          <a:miter lim="800000"/>
         </a:ln>
         <a:ln w="25400" cap="flat" cmpd="sng" algn="ctr">
           <a:solidFill>
             <a:schemeClr val="phClr"/>
           </a:solidFill>
           <a:prstDash val="solid"/>
-        </a:ln>
-        <a:ln w="38100" cap="flat" cmpd="sng" algn="ctr">
-          <a:solidFill>
-            <a:schemeClr val="phClr"/>
-          </a:solidFill>
-          <a:prstDash val="solid"/>
+          <a:miter lim="800000"/>
         </a:ln>
       </a:lnStyleLst>
       <a:effectStyleLst>
         <a:effectStyle>
+          <a:effectLst/>
+        </a:effectStyle>
+        <a:effectStyle>
+          <a:effectLst/>
+        </a:effectStyle>
+        <a:effectStyle>
           <a:effectLst>
-            <a:outerShdw blurRad="40000" dist="20000" dir="5400000" rotWithShape="0">
+            <a:outerShdw blurRad="57150" dist="19050" dir="5400000" algn="ctr" rotWithShape="0">
               <a:srgbClr val="000000">
-                <a:alpha val="38000"/>
+                <a:alpha val="63000"/>
               </a:srgbClr>
             </a:outerShdw>
           </a:effectLst>
-        </a:effectStyle>
-        <a:effectStyle>
-          <a:effectLst>
-            <a:outerShdw blurRad="40000" dist="23000" dir="5400000" rotWithShape="0">
-              <a:srgbClr val="000000">
-                <a:alpha val="35000"/>
-              </a:srgbClr>
-            </a:outerShdw>
-          </a:effectLst>
-        </a:effectStyle>
-        <a:effectStyle>
-          <a:effectLst>
-            <a:outerShdw blurRad="40000" dist="23000" dir="5400000" rotWithShape="0">
-              <a:srgbClr val="000000">
-                <a:alpha val="35000"/>
-              </a:srgbClr>
-            </a:outerShdw>
-          </a:effectLst>
-          <a:scene3d>
-            <a:camera prst="orthographicFront">
-              <a:rot lat="0" lon="0" rev="0"/>
-            </a:camera>
-            <a:lightRig rig="threePt" dir="t">
-              <a:rot lat="0" lon="0" rev="1200000"/>
-            </a:lightRig>
-          </a:scene3d>
-          <a:sp3d>
-            <a:bevelT w="63500" h="25400"/>
-          </a:sp3d>
         </a:effectStyle>
       </a:effectStyleLst>
       <a:bgFillStyleLst>
         <a:solidFill>
           <a:schemeClr val="phClr"/>
         </a:solidFill>
+        <a:solidFill>
+          <a:schemeClr val="phClr">
+            <a:tint val="95000"/>
+            <a:satMod val="170000"/>
+          </a:schemeClr>
+        </a:solidFill>
         <a:gradFill rotWithShape="1">
           <a:gsLst>
             <a:gs pos="0">
               <a:schemeClr val="phClr">
-                <a:tint val="40000"/>
-                <a:satMod val="350000"/>
+                <a:tint val="93000"/>
+                <a:satMod val="150000"/>
+                <a:shade val="98000"/>
+                <a:lumMod val="102000"/>
               </a:schemeClr>
             </a:gs>
-            <a:gs pos="40000">
+            <a:gs pos="50000">
               <a:schemeClr val="phClr">
-                <a:tint val="45000"/>
-                <a:shade val="99000"/>
-                <a:satMod val="350000"/>
+                <a:tint val="98000"/>
+                <a:satMod val="130000"/>
+                <a:shade val="90000"/>
+                <a:lumMod val="103000"/>
               </a:schemeClr>
             </a:gs>
             <a:gs pos="100000">
               <a:schemeClr val="phClr">
-                <a:shade val="20000"/>
-                <a:satMod val="255000"/>
+                <a:shade val="63000"/>
+                <a:satMod val="120000"/>
               </a:schemeClr>
             </a:gs>
           </a:gsLst>
-          <a:path path="circle">
-            <a:fillToRect l="50000" t="-80000" r="50000" b="180000"/>
-          </a:path>
-        </a:gradFill>
-        <a:gradFill rotWithShape="1">
-          <a:gsLst>
-            <a:gs pos="0">
-              <a:schemeClr val="phClr">
-                <a:tint val="80000"/>
-                <a:satMod val="300000"/>
-              </a:schemeClr>
-            </a:gs>
-            <a:gs pos="100000">
-              <a:schemeClr val="phClr">
-                <a:shade val="30000"/>
-                <a:satMod val="200000"/>
-              </a:schemeClr>
-            </a:gs>
-          </a:gsLst>
-          <a:path path="circle">
-            <a:fillToRect l="50000" t="50000" r="50000" b="50000"/>
-          </a:path>
+          <a:lin ang="5400000" scaled="0"/>
         </a:gradFill>
       </a:bgFillStyleLst>
     </a:fmtScheme>
   </a:themeElements>
   <a:objectDefaults>
-    <a:spDef>
-      <a:spPr/>
-      <a:bodyPr/>
-      <a:lstStyle/>
-      <a:style>
-        <a:lnRef idx="1">
-          <a:schemeClr val="accent1"/>
-        </a:lnRef>
-        <a:fillRef idx="3">
-          <a:schemeClr val="accent1"/>
-        </a:fillRef>
-        <a:effectRef idx="2">
-          <a:schemeClr val="accent1"/>
-        </a:effectRef>
-        <a:fontRef idx="minor">
-          <a:schemeClr val="lt1"/>
-        </a:fontRef>
-      </a:style>
-    </a:spDef>
     <a:lnDef>
       <a:spPr/>
       <a:bodyPr/>
@@ -4823,5 +7343,10 @@
     </a:lnDef>
   </a:objectDefaults>
   <a:extraClrSchemeLst/>
+  <a:extLst>
+    <a:ext uri="{05A4C25C-085E-4340-85A3-A5531E510DB2}">
+      <thm15:themeFamily xmlns:thm15="http://schemas.microsoft.com/office/thememl/2012/main" name="Office Theme" id="{2E142A2C-CD16-42D6-873A-C26D2A0506FA}" vid="{1BDDFF52-6CD6-40A5-AB3C-68EB2F1E4D0A}"/>
+    </a:ext>
+  </a:extLst>
 </a:theme>
 </file>